--- a/day03.pptx
+++ b/day03.pptx
@@ -5,7 +5,7 @@
     <p:sldMasterId id="2147483648" r:id="rId1"/>
   </p:sldMasterIdLst>
   <p:notesMasterIdLst>
-    <p:notesMasterId r:id="rId14"/>
+    <p:notesMasterId r:id="rId15"/>
   </p:notesMasterIdLst>
   <p:sldIdLst>
     <p:sldId id="256" r:id="rId2"/>
@@ -20,6 +20,7 @@
     <p:sldId id="265" r:id="rId11"/>
     <p:sldId id="266" r:id="rId12"/>
     <p:sldId id="267" r:id="rId13"/>
+    <p:sldId id="268" r:id="rId14"/>
   </p:sldIdLst>
   <p:sldSz cx="12192000" cy="6858000"/>
   <p:notesSz cx="6858000" cy="9144000"/>
@@ -656,7 +657,7 @@
           <a:p>
             <a:fld id="{2B346891-79C8-8C42-A264-D9976EDAD437}" type="datetimeFigureOut">
               <a:rPr lang="en-US" smtClean="0"/>
-              <a:t>8/20/26</a:t>
+              <a:t>8/31/26</a:t>
             </a:fld>
             <a:endParaRPr lang="en-US"/>
           </a:p>
@@ -1157,7 +1158,7 @@
           <a:p>
             <a:fld id="{2160428C-B2E7-3E4C-BEA2-61A621D3A559}" type="datetimeFigureOut">
               <a:rPr lang="en-US" smtClean="0"/>
-              <a:t>8/20/26</a:t>
+              <a:t>8/31/26</a:t>
             </a:fld>
             <a:endParaRPr lang="en-US"/>
           </a:p>
@@ -1357,7 +1358,7 @@
           <a:p>
             <a:fld id="{2160428C-B2E7-3E4C-BEA2-61A621D3A559}" type="datetimeFigureOut">
               <a:rPr lang="en-US" smtClean="0"/>
-              <a:t>8/20/26</a:t>
+              <a:t>8/31/26</a:t>
             </a:fld>
             <a:endParaRPr lang="en-US"/>
           </a:p>
@@ -1567,7 +1568,7 @@
           <a:p>
             <a:fld id="{2160428C-B2E7-3E4C-BEA2-61A621D3A559}" type="datetimeFigureOut">
               <a:rPr lang="en-US" smtClean="0"/>
-              <a:t>8/20/26</a:t>
+              <a:t>8/31/26</a:t>
             </a:fld>
             <a:endParaRPr lang="en-US"/>
           </a:p>
@@ -1767,7 +1768,7 @@
           <a:p>
             <a:fld id="{2160428C-B2E7-3E4C-BEA2-61A621D3A559}" type="datetimeFigureOut">
               <a:rPr lang="en-US" smtClean="0"/>
-              <a:t>8/20/26</a:t>
+              <a:t>8/31/26</a:t>
             </a:fld>
             <a:endParaRPr lang="en-US"/>
           </a:p>
@@ -2043,7 +2044,7 @@
           <a:p>
             <a:fld id="{2160428C-B2E7-3E4C-BEA2-61A621D3A559}" type="datetimeFigureOut">
               <a:rPr lang="en-US" smtClean="0"/>
-              <a:t>8/20/26</a:t>
+              <a:t>8/31/26</a:t>
             </a:fld>
             <a:endParaRPr lang="en-US"/>
           </a:p>
@@ -2311,7 +2312,7 @@
           <a:p>
             <a:fld id="{2160428C-B2E7-3E4C-BEA2-61A621D3A559}" type="datetimeFigureOut">
               <a:rPr lang="en-US" smtClean="0"/>
-              <a:t>8/20/26</a:t>
+              <a:t>8/31/26</a:t>
             </a:fld>
             <a:endParaRPr lang="en-US"/>
           </a:p>
@@ -2726,7 +2727,7 @@
           <a:p>
             <a:fld id="{2160428C-B2E7-3E4C-BEA2-61A621D3A559}" type="datetimeFigureOut">
               <a:rPr lang="en-US" smtClean="0"/>
-              <a:t>8/20/26</a:t>
+              <a:t>8/31/26</a:t>
             </a:fld>
             <a:endParaRPr lang="en-US"/>
           </a:p>
@@ -2868,7 +2869,7 @@
           <a:p>
             <a:fld id="{2160428C-B2E7-3E4C-BEA2-61A621D3A559}" type="datetimeFigureOut">
               <a:rPr lang="en-US" smtClean="0"/>
-              <a:t>8/20/26</a:t>
+              <a:t>8/31/26</a:t>
             </a:fld>
             <a:endParaRPr lang="en-US"/>
           </a:p>
@@ -2981,7 +2982,7 @@
           <a:p>
             <a:fld id="{2160428C-B2E7-3E4C-BEA2-61A621D3A559}" type="datetimeFigureOut">
               <a:rPr lang="en-US" smtClean="0"/>
-              <a:t>8/20/26</a:t>
+              <a:t>8/31/26</a:t>
             </a:fld>
             <a:endParaRPr lang="en-US"/>
           </a:p>
@@ -3294,7 +3295,7 @@
           <a:p>
             <a:fld id="{2160428C-B2E7-3E4C-BEA2-61A621D3A559}" type="datetimeFigureOut">
               <a:rPr lang="en-US" smtClean="0"/>
-              <a:t>8/20/26</a:t>
+              <a:t>8/31/26</a:t>
             </a:fld>
             <a:endParaRPr lang="en-US"/>
           </a:p>
@@ -3583,7 +3584,7 @@
           <a:p>
             <a:fld id="{2160428C-B2E7-3E4C-BEA2-61A621D3A559}" type="datetimeFigureOut">
               <a:rPr lang="en-US" smtClean="0"/>
-              <a:t>8/20/26</a:t>
+              <a:t>8/31/26</a:t>
             </a:fld>
             <a:endParaRPr lang="en-US"/>
           </a:p>
@@ -3826,7 +3827,7 @@
           <a:p>
             <a:fld id="{2160428C-B2E7-3E4C-BEA2-61A621D3A559}" type="datetimeFigureOut">
               <a:rPr lang="en-US" smtClean="0"/>
-              <a:t>8/20/26</a:t>
+              <a:t>8/31/26</a:t>
             </a:fld>
             <a:endParaRPr lang="en-US"/>
           </a:p>
@@ -5501,112 +5502,118 @@
           <a:lstStyle/>
           <a:p>
             <a:r>
-              <a:rPr lang="en-US" dirty="0"/>
+              <a:rPr lang="en-US" sz="3600" dirty="0"/>
               <a:t>Heading</a:t>
             </a:r>
             <a:br>
-              <a:rPr lang="en-US" dirty="0"/>
+              <a:rPr lang="en-US" sz="3600" dirty="0"/>
             </a:br>
             <a:r>
-              <a:rPr lang="en-US" dirty="0"/>
+              <a:rPr lang="en-US" sz="3600" dirty="0"/>
               <a:t>Paragraph</a:t>
             </a:r>
             <a:br>
-              <a:rPr lang="en-US" dirty="0"/>
+              <a:rPr lang="en-US" sz="3600" dirty="0"/>
             </a:br>
             <a:r>
-              <a:rPr lang="en-US" dirty="0"/>
+              <a:rPr lang="en-US" sz="3600" dirty="0"/>
               <a:t>Links</a:t>
             </a:r>
             <a:br>
-              <a:rPr lang="en-US" dirty="0"/>
+              <a:rPr lang="en-US" sz="3600" dirty="0"/>
             </a:br>
             <a:r>
-              <a:rPr lang="en-US" dirty="0"/>
+              <a:rPr lang="en-US" sz="3600" dirty="0"/>
               <a:t>	internal-external</a:t>
             </a:r>
             <a:br>
-              <a:rPr lang="en-US" dirty="0"/>
+              <a:rPr lang="en-US" sz="3600" dirty="0"/>
             </a:br>
             <a:r>
-              <a:rPr lang="en-US" dirty="0" err="1"/>
+              <a:rPr lang="en-US" sz="3600" dirty="0" err="1"/>
               <a:t>tron,tron</a:t>
             </a:r>
             <a:r>
-              <a:rPr lang="en-US" dirty="0"/>
+              <a:rPr lang="en-US" sz="3600" dirty="0"/>
               <a:t> 2</a:t>
             </a:r>
             <a:br>
-              <a:rPr lang="en-US" dirty="0"/>
+              <a:rPr lang="en-US" sz="3600" dirty="0"/>
             </a:br>
             <a:r>
-              <a:rPr lang="en-US" dirty="0"/>
+              <a:rPr lang="en-US" sz="3600" dirty="0"/>
               <a:t>images</a:t>
             </a:r>
             <a:br>
-              <a:rPr lang="en-US" dirty="0"/>
+              <a:rPr lang="en-US" sz="3600" dirty="0"/>
             </a:br>
             <a:r>
-              <a:rPr lang="en-US" dirty="0"/>
+              <a:rPr lang="en-US" sz="3600" dirty="0"/>
               <a:t>inline vs block element</a:t>
             </a:r>
             <a:br>
-              <a:rPr lang="en-US" dirty="0"/>
+              <a:rPr lang="en-US" sz="3600" dirty="0"/>
             </a:br>
             <a:r>
-              <a:rPr lang="en-US" dirty="0" err="1"/>
+              <a:rPr lang="en-US" sz="3600" dirty="0" err="1"/>
               <a:t>Iframe</a:t>
             </a:r>
             <a:br>
-              <a:rPr lang="en-US" dirty="0"/>
+              <a:rPr lang="en-US" sz="3600" dirty="0"/>
             </a:br>
             <a:r>
-              <a:rPr lang="en-US" dirty="0"/>
+              <a:rPr lang="en-US" sz="3600" dirty="0"/>
               <a:t>unordered lists</a:t>
             </a:r>
             <a:br>
-              <a:rPr lang="en-US" dirty="0"/>
+              <a:rPr lang="en-US" sz="3600" dirty="0"/>
             </a:br>
             <a:r>
-              <a:rPr lang="en-US" dirty="0"/>
+              <a:rPr lang="en-US" sz="3600" dirty="0"/>
               <a:t>ordered lists</a:t>
             </a:r>
             <a:br>
-              <a:rPr lang="en-US" dirty="0"/>
+              <a:rPr lang="en-US" sz="3600" dirty="0"/>
             </a:br>
             <a:r>
-              <a:rPr lang="en-US" dirty="0"/>
+              <a:rPr lang="en-US" sz="3600" dirty="0"/>
               <a:t>description</a:t>
             </a:r>
             <a:br>
-              <a:rPr lang="en-US" dirty="0"/>
+              <a:rPr lang="en-US" sz="3600" dirty="0"/>
             </a:br>
             <a:r>
-              <a:rPr lang="en-US" dirty="0"/>
+              <a:rPr lang="en-US" sz="3600" dirty="0"/>
               <a:t>tables</a:t>
             </a:r>
             <a:br>
-              <a:rPr lang="en-US" dirty="0"/>
+              <a:rPr lang="en-US" sz="3600" dirty="0"/>
             </a:br>
             <a:r>
-              <a:rPr lang="en-US" dirty="0"/>
+              <a:rPr lang="en-US" sz="3600" dirty="0"/>
               <a:t>Word Decoration</a:t>
             </a:r>
             <a:br>
-              <a:rPr lang="en-US" dirty="0"/>
+              <a:rPr lang="en-US" sz="3600" dirty="0"/>
             </a:br>
             <a:r>
-              <a:rPr lang="en-US" dirty="0"/>
+              <a:rPr lang="en-US" sz="3600" dirty="0"/>
               <a:t>Comments</a:t>
             </a:r>
             <a:br>
-              <a:rPr lang="en-US"/>
+              <a:rPr lang="en-US" sz="3600" dirty="0"/>
             </a:br>
             <a:r>
-              <a:rPr lang="en-US"/>
+              <a:rPr lang="en-US" sz="3600" dirty="0"/>
               <a:t>Project 1 Login Page</a:t>
             </a:r>
-            <a:endParaRPr lang="en-US" dirty="0"/>
+            <a:br>
+              <a:rPr lang="en-US" sz="3600" dirty="0"/>
+            </a:br>
+            <a:r>
+              <a:rPr lang="en-US" sz="3600" dirty="0"/>
+              <a:t>Project 2 Online Payment Page</a:t>
+            </a:r>
           </a:p>
         </p:txBody>
       </p:sp>
@@ -5646,6 +5653,231 @@
     <p:extLst>
       <p:ext uri="{BB962C8B-B14F-4D97-AF65-F5344CB8AC3E}">
         <p14:creationId xmlns:p14="http://schemas.microsoft.com/office/powerpoint/2010/main" val="3125474315"/>
+      </p:ext>
+    </p:extLst>
+  </p:cSld>
+  <p:clrMapOvr>
+    <a:masterClrMapping/>
+  </p:clrMapOvr>
+</p:sld>
+</file>
+
+<file path=ppt/slides/slide13.xml><?xml version="1.0" encoding="utf-8"?>
+<p:sld xmlns:a="http://schemas.openxmlformats.org/drawingml/2006/main" xmlns:r="http://schemas.openxmlformats.org/officeDocument/2006/relationships" xmlns:p="http://schemas.openxmlformats.org/presentationml/2006/main">
+  <p:cSld>
+    <p:spTree>
+      <p:nvGrpSpPr>
+        <p:cNvPr id="1" name=""/>
+        <p:cNvGrpSpPr/>
+        <p:nvPr/>
+      </p:nvGrpSpPr>
+      <p:grpSpPr>
+        <a:xfrm>
+          <a:off x="0" y="0"/>
+          <a:ext cx="0" cy="0"/>
+          <a:chOff x="0" y="0"/>
+          <a:chExt cx="0" cy="0"/>
+        </a:xfrm>
+      </p:grpSpPr>
+      <p:sp>
+        <p:nvSpPr>
+          <p:cNvPr id="2" name="Title 1">
+            <a:extLst>
+              <a:ext uri="{FF2B5EF4-FFF2-40B4-BE49-F238E27FC236}">
+                <a16:creationId xmlns:a16="http://schemas.microsoft.com/office/drawing/2014/main" id="{86DFCF61-7669-95DA-F151-6AC22DD4FF51}"/>
+              </a:ext>
+            </a:extLst>
+          </p:cNvPr>
+          <p:cNvSpPr>
+            <a:spLocks noGrp="1"/>
+          </p:cNvSpPr>
+          <p:nvPr>
+            <p:ph type="title"/>
+          </p:nvPr>
+        </p:nvSpPr>
+        <p:spPr/>
+        <p:txBody>
+          <a:bodyPr/>
+          <a:lstStyle/>
+          <a:p>
+            <a:r>
+              <a:rPr lang="en-US" dirty="0"/>
+              <a:t>CSS</a:t>
+            </a:r>
+          </a:p>
+        </p:txBody>
+      </p:sp>
+      <p:sp>
+        <p:nvSpPr>
+          <p:cNvPr id="3" name="Content Placeholder 2">
+            <a:extLst>
+              <a:ext uri="{FF2B5EF4-FFF2-40B4-BE49-F238E27FC236}">
+                <a16:creationId xmlns:a16="http://schemas.microsoft.com/office/drawing/2014/main" id="{B21F7FD3-FEE4-C91E-C0D2-EC56FF367D12}"/>
+              </a:ext>
+            </a:extLst>
+          </p:cNvPr>
+          <p:cNvSpPr>
+            <a:spLocks noGrp="1"/>
+          </p:cNvSpPr>
+          <p:nvPr>
+            <p:ph idx="1"/>
+          </p:nvPr>
+        </p:nvSpPr>
+        <p:spPr/>
+        <p:txBody>
+          <a:bodyPr numCol="2">
+            <a:normAutofit fontScale="77500" lnSpcReduction="20000"/>
+          </a:bodyPr>
+          <a:lstStyle/>
+          <a:p>
+            <a:r>
+              <a:rPr lang="en-US" dirty="0"/>
+              <a:t>Inline CSS</a:t>
+            </a:r>
+          </a:p>
+          <a:p>
+            <a:r>
+              <a:rPr lang="en-US" dirty="0"/>
+              <a:t>External CSS</a:t>
+            </a:r>
+          </a:p>
+          <a:p>
+            <a:r>
+              <a:rPr lang="en-US" dirty="0"/>
+              <a:t>Classes and IDs</a:t>
+            </a:r>
+          </a:p>
+          <a:p>
+            <a:r>
+              <a:rPr lang="en-US" dirty="0"/>
+              <a:t>Div and Span</a:t>
+            </a:r>
+          </a:p>
+          <a:p>
+            <a:r>
+              <a:rPr lang="en-US" dirty="0"/>
+              <a:t>Box Model</a:t>
+            </a:r>
+          </a:p>
+          <a:p>
+            <a:r>
+              <a:rPr lang="en-US" dirty="0"/>
+              <a:t>Box Model: Border</a:t>
+            </a:r>
+          </a:p>
+          <a:p>
+            <a:r>
+              <a:rPr lang="en-US" dirty="0"/>
+              <a:t>Box Model: Outline</a:t>
+            </a:r>
+          </a:p>
+          <a:p>
+            <a:r>
+              <a:rPr lang="en-US" dirty="0"/>
+              <a:t>Box Model: Margin</a:t>
+            </a:r>
+          </a:p>
+          <a:p>
+            <a:r>
+              <a:rPr lang="en-US" dirty="0"/>
+              <a:t>Background</a:t>
+            </a:r>
+          </a:p>
+          <a:p>
+            <a:r>
+              <a:rPr lang="en-US" dirty="0"/>
+              <a:t>Floating</a:t>
+            </a:r>
+          </a:p>
+          <a:p>
+            <a:r>
+              <a:rPr lang="en-US" dirty="0"/>
+              <a:t>Positioning</a:t>
+            </a:r>
+          </a:p>
+          <a:p>
+            <a:r>
+              <a:rPr lang="en-US" dirty="0"/>
+              <a:t>Display</a:t>
+            </a:r>
+          </a:p>
+          <a:p>
+            <a:r>
+              <a:rPr lang="en-US" dirty="0"/>
+              <a:t>Text decoration</a:t>
+            </a:r>
+          </a:p>
+          <a:p>
+            <a:r>
+              <a:rPr lang="en-US" dirty="0"/>
+              <a:t>Text align</a:t>
+            </a:r>
+          </a:p>
+          <a:p>
+            <a:r>
+              <a:rPr lang="en-US" dirty="0"/>
+              <a:t>Text font</a:t>
+            </a:r>
+          </a:p>
+          <a:p>
+            <a:r>
+              <a:rPr lang="en-US" dirty="0"/>
+              <a:t>Text effects</a:t>
+            </a:r>
+          </a:p>
+          <a:p>
+            <a:r>
+              <a:rPr lang="en-US" dirty="0"/>
+              <a:t>Image </a:t>
+            </a:r>
+            <a:r>
+              <a:rPr lang="en-US" dirty="0" err="1"/>
+              <a:t>Sprities</a:t>
+            </a:r>
+            <a:endParaRPr lang="en-US" dirty="0"/>
+          </a:p>
+          <a:p>
+            <a:r>
+              <a:rPr lang="en-US" dirty="0"/>
+              <a:t>Image Opacity</a:t>
+            </a:r>
+          </a:p>
+          <a:p>
+            <a:r>
+              <a:rPr lang="en-US" dirty="0"/>
+              <a:t>Styling Lists</a:t>
+            </a:r>
+          </a:p>
+          <a:p>
+            <a:r>
+              <a:rPr lang="en-US" dirty="0"/>
+              <a:t>2d transforms</a:t>
+            </a:r>
+          </a:p>
+          <a:p>
+            <a:r>
+              <a:rPr lang="en-US" dirty="0"/>
+              <a:t>3d transforms</a:t>
+            </a:r>
+          </a:p>
+          <a:p>
+            <a:r>
+              <a:rPr lang="en-US" dirty="0"/>
+              <a:t>Transitions</a:t>
+            </a:r>
+          </a:p>
+          <a:p>
+            <a:r>
+              <a:rPr lang="en-US" dirty="0"/>
+              <a:t>Animations</a:t>
+            </a:r>
+          </a:p>
+        </p:txBody>
+      </p:sp>
+    </p:spTree>
+    <p:extLst>
+      <p:ext uri="{BB962C8B-B14F-4D97-AF65-F5344CB8AC3E}">
+        <p14:creationId xmlns:p14="http://schemas.microsoft.com/office/powerpoint/2010/main" val="2387953025"/>
       </p:ext>
     </p:extLst>
   </p:cSld>

--- a/day03.pptx
+++ b/day03.pptx
@@ -5,7 +5,7 @@
     <p:sldMasterId id="2147483648" r:id="rId1"/>
   </p:sldMasterIdLst>
   <p:notesMasterIdLst>
-    <p:notesMasterId r:id="rId15"/>
+    <p:notesMasterId r:id="rId16"/>
   </p:notesMasterIdLst>
   <p:sldIdLst>
     <p:sldId id="256" r:id="rId2"/>
@@ -21,6 +21,7 @@
     <p:sldId id="266" r:id="rId12"/>
     <p:sldId id="267" r:id="rId13"/>
     <p:sldId id="268" r:id="rId14"/>
+    <p:sldId id="269" r:id="rId15"/>
   </p:sldIdLst>
   <p:sldSz cx="12192000" cy="6858000"/>
   <p:notesSz cx="6858000" cy="9144000"/>
@@ -351,6 +352,34 @@
 </inkml:ink>
 </file>
 
+<file path=ppt/ink/ink17.xml><?xml version="1.0" encoding="utf-8"?>
+<inkml:ink xmlns:inkml="http://www.w3.org/2003/InkML">
+  <inkml:definitions>
+    <inkml:context xml:id="ctx0">
+      <inkml:inkSource xml:id="inkSrc0">
+        <inkml:traceFormat>
+          <inkml:channel name="X" type="integer" min="-2.14748E9" max="2.14748E9" units="cm"/>
+          <inkml:channel name="Y" type="integer" min="-2.14748E9" max="2.14748E9" units="cm"/>
+          <inkml:channel name="F" type="integer" max="32767" units="dev"/>
+        </inkml:traceFormat>
+        <inkml:channelProperties>
+          <inkml:channelProperty channel="X" name="resolution" value="1000" units="1/cm"/>
+          <inkml:channelProperty channel="Y" name="resolution" value="1000" units="1/cm"/>
+          <inkml:channelProperty channel="F" name="resolution" value="0" units="1/dev"/>
+        </inkml:channelProperties>
+      </inkml:inkSource>
+      <inkml:timestamp xml:id="ts0" timeString="2026-09-10T13:35:26.921"/>
+    </inkml:context>
+    <inkml:brush xml:id="br0">
+      <inkml:brushProperty name="width" value="0.035" units="cm"/>
+      <inkml:brushProperty name="height" value="0.035" units="cm"/>
+      <inkml:brushProperty name="color" value="#66CC00"/>
+    </inkml:brush>
+  </inkml:definitions>
+  <inkml:trace contextRef="#ctx0" brushRef="#br0">1 1 24575,'0'0'0</inkml:trace>
+</inkml:ink>
+</file>
+
 <file path=ppt/ink/ink2.xml><?xml version="1.0" encoding="utf-8"?>
 <inkml:ink xmlns:inkml="http://www.w3.org/2003/InkML">
   <inkml:definitions>
@@ -657,7 +686,7 @@
           <a:p>
             <a:fld id="{2B346891-79C8-8C42-A264-D9976EDAD437}" type="datetimeFigureOut">
               <a:rPr lang="en-US" smtClean="0"/>
-              <a:t>8/31/26</a:t>
+              <a:t>9/11/26</a:t>
             </a:fld>
             <a:endParaRPr lang="en-US"/>
           </a:p>
@@ -1158,7 +1187,7 @@
           <a:p>
             <a:fld id="{2160428C-B2E7-3E4C-BEA2-61A621D3A559}" type="datetimeFigureOut">
               <a:rPr lang="en-US" smtClean="0"/>
-              <a:t>8/31/26</a:t>
+              <a:t>9/11/26</a:t>
             </a:fld>
             <a:endParaRPr lang="en-US"/>
           </a:p>
@@ -1358,7 +1387,7 @@
           <a:p>
             <a:fld id="{2160428C-B2E7-3E4C-BEA2-61A621D3A559}" type="datetimeFigureOut">
               <a:rPr lang="en-US" smtClean="0"/>
-              <a:t>8/31/26</a:t>
+              <a:t>9/11/26</a:t>
             </a:fld>
             <a:endParaRPr lang="en-US"/>
           </a:p>
@@ -1568,7 +1597,7 @@
           <a:p>
             <a:fld id="{2160428C-B2E7-3E4C-BEA2-61A621D3A559}" type="datetimeFigureOut">
               <a:rPr lang="en-US" smtClean="0"/>
-              <a:t>8/31/26</a:t>
+              <a:t>9/11/26</a:t>
             </a:fld>
             <a:endParaRPr lang="en-US"/>
           </a:p>
@@ -1768,7 +1797,7 @@
           <a:p>
             <a:fld id="{2160428C-B2E7-3E4C-BEA2-61A621D3A559}" type="datetimeFigureOut">
               <a:rPr lang="en-US" smtClean="0"/>
-              <a:t>8/31/26</a:t>
+              <a:t>9/11/26</a:t>
             </a:fld>
             <a:endParaRPr lang="en-US"/>
           </a:p>
@@ -2044,7 +2073,7 @@
           <a:p>
             <a:fld id="{2160428C-B2E7-3E4C-BEA2-61A621D3A559}" type="datetimeFigureOut">
               <a:rPr lang="en-US" smtClean="0"/>
-              <a:t>8/31/26</a:t>
+              <a:t>9/11/26</a:t>
             </a:fld>
             <a:endParaRPr lang="en-US"/>
           </a:p>
@@ -2312,7 +2341,7 @@
           <a:p>
             <a:fld id="{2160428C-B2E7-3E4C-BEA2-61A621D3A559}" type="datetimeFigureOut">
               <a:rPr lang="en-US" smtClean="0"/>
-              <a:t>8/31/26</a:t>
+              <a:t>9/11/26</a:t>
             </a:fld>
             <a:endParaRPr lang="en-US"/>
           </a:p>
@@ -2727,7 +2756,7 @@
           <a:p>
             <a:fld id="{2160428C-B2E7-3E4C-BEA2-61A621D3A559}" type="datetimeFigureOut">
               <a:rPr lang="en-US" smtClean="0"/>
-              <a:t>8/31/26</a:t>
+              <a:t>9/11/26</a:t>
             </a:fld>
             <a:endParaRPr lang="en-US"/>
           </a:p>
@@ -2869,7 +2898,7 @@
           <a:p>
             <a:fld id="{2160428C-B2E7-3E4C-BEA2-61A621D3A559}" type="datetimeFigureOut">
               <a:rPr lang="en-US" smtClean="0"/>
-              <a:t>8/31/26</a:t>
+              <a:t>9/11/26</a:t>
             </a:fld>
             <a:endParaRPr lang="en-US"/>
           </a:p>
@@ -2982,7 +3011,7 @@
           <a:p>
             <a:fld id="{2160428C-B2E7-3E4C-BEA2-61A621D3A559}" type="datetimeFigureOut">
               <a:rPr lang="en-US" smtClean="0"/>
-              <a:t>8/31/26</a:t>
+              <a:t>9/11/26</a:t>
             </a:fld>
             <a:endParaRPr lang="en-US"/>
           </a:p>
@@ -3295,7 +3324,7 @@
           <a:p>
             <a:fld id="{2160428C-B2E7-3E4C-BEA2-61A621D3A559}" type="datetimeFigureOut">
               <a:rPr lang="en-US" smtClean="0"/>
-              <a:t>8/31/26</a:t>
+              <a:t>9/11/26</a:t>
             </a:fld>
             <a:endParaRPr lang="en-US"/>
           </a:p>
@@ -3584,7 +3613,7 @@
           <a:p>
             <a:fld id="{2160428C-B2E7-3E4C-BEA2-61A621D3A559}" type="datetimeFigureOut">
               <a:rPr lang="en-US" smtClean="0"/>
-              <a:t>8/31/26</a:t>
+              <a:t>9/11/26</a:t>
             </a:fld>
             <a:endParaRPr lang="en-US"/>
           </a:p>
@@ -3827,7 +3856,7 @@
           <a:p>
             <a:fld id="{2160428C-B2E7-3E4C-BEA2-61A621D3A559}" type="datetimeFigureOut">
               <a:rPr lang="en-US" smtClean="0"/>
-              <a:t>8/31/26</a:t>
+              <a:t>9/11/26</a:t>
             </a:fld>
             <a:endParaRPr lang="en-US"/>
           </a:p>
@@ -5878,6 +5907,154 @@
     <p:extLst>
       <p:ext uri="{BB962C8B-B14F-4D97-AF65-F5344CB8AC3E}">
         <p14:creationId xmlns:p14="http://schemas.microsoft.com/office/powerpoint/2010/main" val="2387953025"/>
+      </p:ext>
+    </p:extLst>
+  </p:cSld>
+  <p:clrMapOvr>
+    <a:masterClrMapping/>
+  </p:clrMapOvr>
+</p:sld>
+</file>
+
+<file path=ppt/slides/slide14.xml><?xml version="1.0" encoding="utf-8"?>
+<p:sld xmlns:a="http://schemas.openxmlformats.org/drawingml/2006/main" xmlns:r="http://schemas.openxmlformats.org/officeDocument/2006/relationships" xmlns:p="http://schemas.openxmlformats.org/presentationml/2006/main">
+  <p:cSld>
+    <p:spTree>
+      <p:nvGrpSpPr>
+        <p:cNvPr id="1" name=""/>
+        <p:cNvGrpSpPr/>
+        <p:nvPr/>
+      </p:nvGrpSpPr>
+      <p:grpSpPr>
+        <a:xfrm>
+          <a:off x="0" y="0"/>
+          <a:ext cx="0" cy="0"/>
+          <a:chOff x="0" y="0"/>
+          <a:chExt cx="0" cy="0"/>
+        </a:xfrm>
+      </p:grpSpPr>
+      <p:sp>
+        <p:nvSpPr>
+          <p:cNvPr id="3" name="Content Placeholder 2">
+            <a:extLst>
+              <a:ext uri="{FF2B5EF4-FFF2-40B4-BE49-F238E27FC236}">
+                <a16:creationId xmlns:a16="http://schemas.microsoft.com/office/drawing/2014/main" id="{A1F0E2CF-CA7C-B074-36CE-E3D1F72923E1}"/>
+              </a:ext>
+            </a:extLst>
+          </p:cNvPr>
+          <p:cNvSpPr>
+            <a:spLocks noGrp="1"/>
+          </p:cNvSpPr>
+          <p:nvPr>
+            <p:ph idx="1"/>
+          </p:nvPr>
+        </p:nvSpPr>
+        <p:spPr>
+          <a:xfrm>
+            <a:off x="585926" y="319596"/>
+            <a:ext cx="11088210" cy="6161103"/>
+          </a:xfrm>
+        </p:spPr>
+        <p:txBody>
+          <a:bodyPr/>
+          <a:lstStyle/>
+          <a:p>
+            <a:r>
+              <a:rPr lang="en-US" dirty="0"/>
+              <a:t>Regular notes HTML, CSS</a:t>
+            </a:r>
+          </a:p>
+          <a:p>
+            <a:r>
+              <a:rPr lang="en-US" dirty="0"/>
+              <a:t>Tron</a:t>
+            </a:r>
+          </a:p>
+          <a:p>
+            <a:r>
+              <a:rPr lang="en-US" dirty="0"/>
+              <a:t>Styling Lists</a:t>
+            </a:r>
+          </a:p>
+          <a:p>
+            <a:r>
+              <a:rPr lang="en-US" dirty="0"/>
+              <a:t>Styling Links </a:t>
+            </a:r>
+          </a:p>
+          <a:p>
+            <a:r>
+              <a:rPr lang="en-US" dirty="0"/>
+              <a:t>Gradients</a:t>
+            </a:r>
+          </a:p>
+          <a:p>
+            <a:r>
+              <a:rPr lang="en-US"/>
+              <a:t>2d transform</a:t>
+            </a:r>
+            <a:endParaRPr lang="en-US" dirty="0"/>
+          </a:p>
+          <a:p>
+            <a:endParaRPr lang="en-US" dirty="0"/>
+          </a:p>
+        </p:txBody>
+      </p:sp>
+      <mc:AlternateContent xmlns:mc="http://schemas.openxmlformats.org/markup-compatibility/2006" xmlns:p14="http://schemas.microsoft.com/office/powerpoint/2010/main">
+        <mc:Choice Requires="p14">
+          <p:contentPart p14:bwMode="auto" r:id="rId2">
+            <p14:nvContentPartPr>
+              <p14:cNvPr id="20" name="Ink 19">
+                <a:extLst>
+                  <a:ext uri="{FF2B5EF4-FFF2-40B4-BE49-F238E27FC236}">
+                    <a16:creationId xmlns:a16="http://schemas.microsoft.com/office/drawing/2014/main" id="{EE7164A3-510A-AA1D-159C-7F860CECE1A8}"/>
+                  </a:ext>
+                </a:extLst>
+              </p14:cNvPr>
+              <p14:cNvContentPartPr/>
+              <p14:nvPr/>
+            </p14:nvContentPartPr>
+            <p14:xfrm>
+              <a:off x="7501023" y="3560701"/>
+              <a:ext cx="360" cy="360"/>
+            </p14:xfrm>
+          </p:contentPart>
+        </mc:Choice>
+        <mc:Fallback xmlns="">
+          <p:pic>
+            <p:nvPicPr>
+              <p:cNvPr id="20" name="Ink 19">
+                <a:extLst>
+                  <a:ext uri="{FF2B5EF4-FFF2-40B4-BE49-F238E27FC236}">
+                    <a16:creationId xmlns:a16="http://schemas.microsoft.com/office/drawing/2014/main" id="{EE7164A3-510A-AA1D-159C-7F860CECE1A8}"/>
+                  </a:ext>
+                </a:extLst>
+              </p:cNvPr>
+              <p:cNvPicPr/>
+              <p:nvPr/>
+            </p:nvPicPr>
+            <p:blipFill>
+              <a:blip r:embed="rId21"/>
+              <a:stretch>
+                <a:fillRect/>
+              </a:stretch>
+            </p:blipFill>
+            <p:spPr>
+              <a:xfrm>
+                <a:off x="7494903" y="3554581"/>
+                <a:ext cx="12600" cy="12600"/>
+              </a:xfrm>
+              <a:prstGeom prst="rect">
+                <a:avLst/>
+              </a:prstGeom>
+            </p:spPr>
+          </p:pic>
+        </mc:Fallback>
+      </mc:AlternateContent>
+    </p:spTree>
+    <p:extLst>
+      <p:ext uri="{BB962C8B-B14F-4D97-AF65-F5344CB8AC3E}">
+        <p14:creationId xmlns:p14="http://schemas.microsoft.com/office/powerpoint/2010/main" val="589694005"/>
       </p:ext>
     </p:extLst>
   </p:cSld>

--- a/day03.pptx
+++ b/day03.pptx
@@ -686,7 +686,7 @@
           <a:p>
             <a:fld id="{2B346891-79C8-8C42-A264-D9976EDAD437}" type="datetimeFigureOut">
               <a:rPr lang="en-US" smtClean="0"/>
-              <a:t>9/11/26</a:t>
+              <a:t>9/16/26</a:t>
             </a:fld>
             <a:endParaRPr lang="en-US"/>
           </a:p>
@@ -1187,7 +1187,7 @@
           <a:p>
             <a:fld id="{2160428C-B2E7-3E4C-BEA2-61A621D3A559}" type="datetimeFigureOut">
               <a:rPr lang="en-US" smtClean="0"/>
-              <a:t>9/11/26</a:t>
+              <a:t>9/16/26</a:t>
             </a:fld>
             <a:endParaRPr lang="en-US"/>
           </a:p>
@@ -1387,7 +1387,7 @@
           <a:p>
             <a:fld id="{2160428C-B2E7-3E4C-BEA2-61A621D3A559}" type="datetimeFigureOut">
               <a:rPr lang="en-US" smtClean="0"/>
-              <a:t>9/11/26</a:t>
+              <a:t>9/16/26</a:t>
             </a:fld>
             <a:endParaRPr lang="en-US"/>
           </a:p>
@@ -1597,7 +1597,7 @@
           <a:p>
             <a:fld id="{2160428C-B2E7-3E4C-BEA2-61A621D3A559}" type="datetimeFigureOut">
               <a:rPr lang="en-US" smtClean="0"/>
-              <a:t>9/11/26</a:t>
+              <a:t>9/16/26</a:t>
             </a:fld>
             <a:endParaRPr lang="en-US"/>
           </a:p>
@@ -1797,7 +1797,7 @@
           <a:p>
             <a:fld id="{2160428C-B2E7-3E4C-BEA2-61A621D3A559}" type="datetimeFigureOut">
               <a:rPr lang="en-US" smtClean="0"/>
-              <a:t>9/11/26</a:t>
+              <a:t>9/16/26</a:t>
             </a:fld>
             <a:endParaRPr lang="en-US"/>
           </a:p>
@@ -2073,7 +2073,7 @@
           <a:p>
             <a:fld id="{2160428C-B2E7-3E4C-BEA2-61A621D3A559}" type="datetimeFigureOut">
               <a:rPr lang="en-US" smtClean="0"/>
-              <a:t>9/11/26</a:t>
+              <a:t>9/16/26</a:t>
             </a:fld>
             <a:endParaRPr lang="en-US"/>
           </a:p>
@@ -2341,7 +2341,7 @@
           <a:p>
             <a:fld id="{2160428C-B2E7-3E4C-BEA2-61A621D3A559}" type="datetimeFigureOut">
               <a:rPr lang="en-US" smtClean="0"/>
-              <a:t>9/11/26</a:t>
+              <a:t>9/16/26</a:t>
             </a:fld>
             <a:endParaRPr lang="en-US"/>
           </a:p>
@@ -2756,7 +2756,7 @@
           <a:p>
             <a:fld id="{2160428C-B2E7-3E4C-BEA2-61A621D3A559}" type="datetimeFigureOut">
               <a:rPr lang="en-US" smtClean="0"/>
-              <a:t>9/11/26</a:t>
+              <a:t>9/16/26</a:t>
             </a:fld>
             <a:endParaRPr lang="en-US"/>
           </a:p>
@@ -2898,7 +2898,7 @@
           <a:p>
             <a:fld id="{2160428C-B2E7-3E4C-BEA2-61A621D3A559}" type="datetimeFigureOut">
               <a:rPr lang="en-US" smtClean="0"/>
-              <a:t>9/11/26</a:t>
+              <a:t>9/16/26</a:t>
             </a:fld>
             <a:endParaRPr lang="en-US"/>
           </a:p>
@@ -3011,7 +3011,7 @@
           <a:p>
             <a:fld id="{2160428C-B2E7-3E4C-BEA2-61A621D3A559}" type="datetimeFigureOut">
               <a:rPr lang="en-US" smtClean="0"/>
-              <a:t>9/11/26</a:t>
+              <a:t>9/16/26</a:t>
             </a:fld>
             <a:endParaRPr lang="en-US"/>
           </a:p>
@@ -3324,7 +3324,7 @@
           <a:p>
             <a:fld id="{2160428C-B2E7-3E4C-BEA2-61A621D3A559}" type="datetimeFigureOut">
               <a:rPr lang="en-US" smtClean="0"/>
-              <a:t>9/11/26</a:t>
+              <a:t>9/16/26</a:t>
             </a:fld>
             <a:endParaRPr lang="en-US"/>
           </a:p>
@@ -3613,7 +3613,7 @@
           <a:p>
             <a:fld id="{2160428C-B2E7-3E4C-BEA2-61A621D3A559}" type="datetimeFigureOut">
               <a:rPr lang="en-US" smtClean="0"/>
-              <a:t>9/11/26</a:t>
+              <a:t>9/16/26</a:t>
             </a:fld>
             <a:endParaRPr lang="en-US"/>
           </a:p>
@@ -3856,7 +3856,7 @@
           <a:p>
             <a:fld id="{2160428C-B2E7-3E4C-BEA2-61A621D3A559}" type="datetimeFigureOut">
               <a:rPr lang="en-US" smtClean="0"/>
-              <a:t>9/11/26</a:t>
+              <a:t>9/16/26</a:t>
             </a:fld>
             <a:endParaRPr lang="en-US"/>
           </a:p>
@@ -5990,9 +5990,24 @@
           </a:p>
           <a:p>
             <a:r>
+              <a:rPr lang="en-US" dirty="0"/>
+              <a:t>2d transform</a:t>
+            </a:r>
+          </a:p>
+          <a:p>
+            <a:r>
+              <a:rPr lang="en-US" dirty="0"/>
+              <a:t>3d transform</a:t>
+            </a:r>
+          </a:p>
+          <a:p>
+            <a:r>
               <a:rPr lang="en-US"/>
-              <a:t>2d transform</a:t>
-            </a:r>
+              <a:t>Mini project</a:t>
+            </a:r>
+            <a:endParaRPr lang="en-US" dirty="0"/>
+          </a:p>
+          <a:p>
             <a:endParaRPr lang="en-US" dirty="0"/>
           </a:p>
           <a:p>

--- a/day03.pptx
+++ b/day03.pptx
@@ -686,7 +686,7 @@
           <a:p>
             <a:fld id="{2B346891-79C8-8C42-A264-D9976EDAD437}" type="datetimeFigureOut">
               <a:rPr lang="en-US" smtClean="0"/>
-              <a:t>9/16/26</a:t>
+              <a:t>9/22/26</a:t>
             </a:fld>
             <a:endParaRPr lang="en-US"/>
           </a:p>
@@ -1187,7 +1187,7 @@
           <a:p>
             <a:fld id="{2160428C-B2E7-3E4C-BEA2-61A621D3A559}" type="datetimeFigureOut">
               <a:rPr lang="en-US" smtClean="0"/>
-              <a:t>9/16/26</a:t>
+              <a:t>9/22/26</a:t>
             </a:fld>
             <a:endParaRPr lang="en-US"/>
           </a:p>
@@ -1387,7 +1387,7 @@
           <a:p>
             <a:fld id="{2160428C-B2E7-3E4C-BEA2-61A621D3A559}" type="datetimeFigureOut">
               <a:rPr lang="en-US" smtClean="0"/>
-              <a:t>9/16/26</a:t>
+              <a:t>9/22/26</a:t>
             </a:fld>
             <a:endParaRPr lang="en-US"/>
           </a:p>
@@ -1597,7 +1597,7 @@
           <a:p>
             <a:fld id="{2160428C-B2E7-3E4C-BEA2-61A621D3A559}" type="datetimeFigureOut">
               <a:rPr lang="en-US" smtClean="0"/>
-              <a:t>9/16/26</a:t>
+              <a:t>9/22/26</a:t>
             </a:fld>
             <a:endParaRPr lang="en-US"/>
           </a:p>
@@ -1797,7 +1797,7 @@
           <a:p>
             <a:fld id="{2160428C-B2E7-3E4C-BEA2-61A621D3A559}" type="datetimeFigureOut">
               <a:rPr lang="en-US" smtClean="0"/>
-              <a:t>9/16/26</a:t>
+              <a:t>9/22/26</a:t>
             </a:fld>
             <a:endParaRPr lang="en-US"/>
           </a:p>
@@ -2073,7 +2073,7 @@
           <a:p>
             <a:fld id="{2160428C-B2E7-3E4C-BEA2-61A621D3A559}" type="datetimeFigureOut">
               <a:rPr lang="en-US" smtClean="0"/>
-              <a:t>9/16/26</a:t>
+              <a:t>9/22/26</a:t>
             </a:fld>
             <a:endParaRPr lang="en-US"/>
           </a:p>
@@ -2341,7 +2341,7 @@
           <a:p>
             <a:fld id="{2160428C-B2E7-3E4C-BEA2-61A621D3A559}" type="datetimeFigureOut">
               <a:rPr lang="en-US" smtClean="0"/>
-              <a:t>9/16/26</a:t>
+              <a:t>9/22/26</a:t>
             </a:fld>
             <a:endParaRPr lang="en-US"/>
           </a:p>
@@ -2756,7 +2756,7 @@
           <a:p>
             <a:fld id="{2160428C-B2E7-3E4C-BEA2-61A621D3A559}" type="datetimeFigureOut">
               <a:rPr lang="en-US" smtClean="0"/>
-              <a:t>9/16/26</a:t>
+              <a:t>9/22/26</a:t>
             </a:fld>
             <a:endParaRPr lang="en-US"/>
           </a:p>
@@ -2898,7 +2898,7 @@
           <a:p>
             <a:fld id="{2160428C-B2E7-3E4C-BEA2-61A621D3A559}" type="datetimeFigureOut">
               <a:rPr lang="en-US" smtClean="0"/>
-              <a:t>9/16/26</a:t>
+              <a:t>9/22/26</a:t>
             </a:fld>
             <a:endParaRPr lang="en-US"/>
           </a:p>
@@ -3011,7 +3011,7 @@
           <a:p>
             <a:fld id="{2160428C-B2E7-3E4C-BEA2-61A621D3A559}" type="datetimeFigureOut">
               <a:rPr lang="en-US" smtClean="0"/>
-              <a:t>9/16/26</a:t>
+              <a:t>9/22/26</a:t>
             </a:fld>
             <a:endParaRPr lang="en-US"/>
           </a:p>
@@ -3324,7 +3324,7 @@
           <a:p>
             <a:fld id="{2160428C-B2E7-3E4C-BEA2-61A621D3A559}" type="datetimeFigureOut">
               <a:rPr lang="en-US" smtClean="0"/>
-              <a:t>9/16/26</a:t>
+              <a:t>9/22/26</a:t>
             </a:fld>
             <a:endParaRPr lang="en-US"/>
           </a:p>
@@ -3613,7 +3613,7 @@
           <a:p>
             <a:fld id="{2160428C-B2E7-3E4C-BEA2-61A621D3A559}" type="datetimeFigureOut">
               <a:rPr lang="en-US" smtClean="0"/>
-              <a:t>9/16/26</a:t>
+              <a:t>9/22/26</a:t>
             </a:fld>
             <a:endParaRPr lang="en-US"/>
           </a:p>
@@ -3856,7 +3856,7 @@
           <a:p>
             <a:fld id="{2160428C-B2E7-3E4C-BEA2-61A621D3A559}" type="datetimeFigureOut">
               <a:rPr lang="en-US" smtClean="0"/>
-              <a:t>9/16/26</a:t>
+              <a:t>9/22/26</a:t>
             </a:fld>
             <a:endParaRPr lang="en-US"/>
           </a:p>
@@ -6002,8 +6002,32 @@
           </a:p>
           <a:p>
             <a:r>
+              <a:rPr lang="en-US" dirty="0"/>
+              <a:t>Mini project</a:t>
+            </a:r>
+          </a:p>
+          <a:p>
+            <a:r>
+              <a:rPr lang="en-US" dirty="0"/>
+              <a:t>Selectors </a:t>
+            </a:r>
+          </a:p>
+          <a:p>
+            <a:r>
+              <a:rPr lang="en-US" dirty="0"/>
+              <a:t>Colors</a:t>
+            </a:r>
+          </a:p>
+          <a:p>
+            <a:r>
+              <a:rPr lang="en-US" dirty="0"/>
+              <a:t>Units</a:t>
+            </a:r>
+          </a:p>
+          <a:p>
+            <a:r>
               <a:rPr lang="en-US"/>
-              <a:t>Mini project</a:t>
+              <a:t>Box Model</a:t>
             </a:r>
             <a:endParaRPr lang="en-US" dirty="0"/>
           </a:p>

--- a/day03.pptx
+++ b/day03.pptx
@@ -686,7 +686,7 @@
           <a:p>
             <a:fld id="{2B346891-79C8-8C42-A264-D9976EDAD437}" type="datetimeFigureOut">
               <a:rPr lang="en-US" smtClean="0"/>
-              <a:t>9/22/26</a:t>
+              <a:t>9/25/26</a:t>
             </a:fld>
             <a:endParaRPr lang="en-US"/>
           </a:p>
@@ -1187,7 +1187,7 @@
           <a:p>
             <a:fld id="{2160428C-B2E7-3E4C-BEA2-61A621D3A559}" type="datetimeFigureOut">
               <a:rPr lang="en-US" smtClean="0"/>
-              <a:t>9/22/26</a:t>
+              <a:t>9/25/26</a:t>
             </a:fld>
             <a:endParaRPr lang="en-US"/>
           </a:p>
@@ -1387,7 +1387,7 @@
           <a:p>
             <a:fld id="{2160428C-B2E7-3E4C-BEA2-61A621D3A559}" type="datetimeFigureOut">
               <a:rPr lang="en-US" smtClean="0"/>
-              <a:t>9/22/26</a:t>
+              <a:t>9/25/26</a:t>
             </a:fld>
             <a:endParaRPr lang="en-US"/>
           </a:p>
@@ -1597,7 +1597,7 @@
           <a:p>
             <a:fld id="{2160428C-B2E7-3E4C-BEA2-61A621D3A559}" type="datetimeFigureOut">
               <a:rPr lang="en-US" smtClean="0"/>
-              <a:t>9/22/26</a:t>
+              <a:t>9/25/26</a:t>
             </a:fld>
             <a:endParaRPr lang="en-US"/>
           </a:p>
@@ -1797,7 +1797,7 @@
           <a:p>
             <a:fld id="{2160428C-B2E7-3E4C-BEA2-61A621D3A559}" type="datetimeFigureOut">
               <a:rPr lang="en-US" smtClean="0"/>
-              <a:t>9/22/26</a:t>
+              <a:t>9/25/26</a:t>
             </a:fld>
             <a:endParaRPr lang="en-US"/>
           </a:p>
@@ -2073,7 +2073,7 @@
           <a:p>
             <a:fld id="{2160428C-B2E7-3E4C-BEA2-61A621D3A559}" type="datetimeFigureOut">
               <a:rPr lang="en-US" smtClean="0"/>
-              <a:t>9/22/26</a:t>
+              <a:t>9/25/26</a:t>
             </a:fld>
             <a:endParaRPr lang="en-US"/>
           </a:p>
@@ -2341,7 +2341,7 @@
           <a:p>
             <a:fld id="{2160428C-B2E7-3E4C-BEA2-61A621D3A559}" type="datetimeFigureOut">
               <a:rPr lang="en-US" smtClean="0"/>
-              <a:t>9/22/26</a:t>
+              <a:t>9/25/26</a:t>
             </a:fld>
             <a:endParaRPr lang="en-US"/>
           </a:p>
@@ -2756,7 +2756,7 @@
           <a:p>
             <a:fld id="{2160428C-B2E7-3E4C-BEA2-61A621D3A559}" type="datetimeFigureOut">
               <a:rPr lang="en-US" smtClean="0"/>
-              <a:t>9/22/26</a:t>
+              <a:t>9/25/26</a:t>
             </a:fld>
             <a:endParaRPr lang="en-US"/>
           </a:p>
@@ -2898,7 +2898,7 @@
           <a:p>
             <a:fld id="{2160428C-B2E7-3E4C-BEA2-61A621D3A559}" type="datetimeFigureOut">
               <a:rPr lang="en-US" smtClean="0"/>
-              <a:t>9/22/26</a:t>
+              <a:t>9/25/26</a:t>
             </a:fld>
             <a:endParaRPr lang="en-US"/>
           </a:p>
@@ -3011,7 +3011,7 @@
           <a:p>
             <a:fld id="{2160428C-B2E7-3E4C-BEA2-61A621D3A559}" type="datetimeFigureOut">
               <a:rPr lang="en-US" smtClean="0"/>
-              <a:t>9/22/26</a:t>
+              <a:t>9/25/26</a:t>
             </a:fld>
             <a:endParaRPr lang="en-US"/>
           </a:p>
@@ -3324,7 +3324,7 @@
           <a:p>
             <a:fld id="{2160428C-B2E7-3E4C-BEA2-61A621D3A559}" type="datetimeFigureOut">
               <a:rPr lang="en-US" smtClean="0"/>
-              <a:t>9/22/26</a:t>
+              <a:t>9/25/26</a:t>
             </a:fld>
             <a:endParaRPr lang="en-US"/>
           </a:p>
@@ -3613,7 +3613,7 @@
           <a:p>
             <a:fld id="{2160428C-B2E7-3E4C-BEA2-61A621D3A559}" type="datetimeFigureOut">
               <a:rPr lang="en-US" smtClean="0"/>
-              <a:t>9/22/26</a:t>
+              <a:t>9/25/26</a:t>
             </a:fld>
             <a:endParaRPr lang="en-US"/>
           </a:p>
@@ -3856,7 +3856,7 @@
           <a:p>
             <a:fld id="{2160428C-B2E7-3E4C-BEA2-61A621D3A559}" type="datetimeFigureOut">
               <a:rPr lang="en-US" smtClean="0"/>
-              <a:t>9/22/26</a:t>
+              <a:t>9/25/26</a:t>
             </a:fld>
             <a:endParaRPr lang="en-US"/>
           </a:p>
@@ -5956,7 +5956,7 @@
           </a:xfrm>
         </p:spPr>
         <p:txBody>
-          <a:bodyPr/>
+          <a:bodyPr numCol="2"/>
           <a:lstStyle/>
           <a:p>
             <a:r>
@@ -6003,32 +6003,43 @@
           <a:p>
             <a:r>
               <a:rPr lang="en-US" dirty="0"/>
+              <a:t>Selectors </a:t>
+            </a:r>
+          </a:p>
+          <a:p>
+            <a:r>
+              <a:rPr lang="en-US" dirty="0"/>
+              <a:t>Colors</a:t>
+            </a:r>
+          </a:p>
+          <a:p>
+            <a:r>
+              <a:rPr lang="en-US" dirty="0"/>
+              <a:t>Units</a:t>
+            </a:r>
+          </a:p>
+          <a:p>
+            <a:r>
+              <a:rPr lang="en-US" dirty="0"/>
+              <a:t>Box Model</a:t>
+            </a:r>
+          </a:p>
+          <a:p>
+            <a:r>
+              <a:rPr lang="en-US" dirty="0"/>
               <a:t>Mini project</a:t>
             </a:r>
           </a:p>
           <a:p>
             <a:r>
               <a:rPr lang="en-US" dirty="0"/>
-              <a:t>Selectors </a:t>
-            </a:r>
-          </a:p>
-          <a:p>
-            <a:r>
-              <a:rPr lang="en-US" dirty="0"/>
-              <a:t>Colors</a:t>
-            </a:r>
-          </a:p>
-          <a:p>
-            <a:r>
-              <a:rPr lang="en-US" dirty="0"/>
-              <a:t>Units</a:t>
-            </a:r>
-          </a:p>
-          <a:p>
-            <a:r>
-              <a:rPr lang="en-US"/>
-              <a:t>Box Model</a:t>
-            </a:r>
+              <a:t>float</a:t>
+            </a:r>
+          </a:p>
+          <a:p>
+            <a:pPr marL="0" indent="0">
+              <a:buNone/>
+            </a:pPr>
             <a:endParaRPr lang="en-US" dirty="0"/>
           </a:p>
           <a:p>

--- a/day03.pptx
+++ b/day03.pptx
@@ -5,7 +5,7 @@
     <p:sldMasterId id="2147483648" r:id="rId1"/>
   </p:sldMasterIdLst>
   <p:notesMasterIdLst>
-    <p:notesMasterId r:id="rId16"/>
+    <p:notesMasterId r:id="rId19"/>
   </p:notesMasterIdLst>
   <p:sldIdLst>
     <p:sldId id="256" r:id="rId2"/>
@@ -22,6 +22,9 @@
     <p:sldId id="267" r:id="rId13"/>
     <p:sldId id="268" r:id="rId14"/>
     <p:sldId id="269" r:id="rId15"/>
+    <p:sldId id="270" r:id="rId16"/>
+    <p:sldId id="271" r:id="rId17"/>
+    <p:sldId id="272" r:id="rId18"/>
   </p:sldIdLst>
   <p:sldSz cx="12192000" cy="6858000"/>
   <p:notesSz cx="6858000" cy="9144000"/>
@@ -686,7 +689,7 @@
           <a:p>
             <a:fld id="{2B346891-79C8-8C42-A264-D9976EDAD437}" type="datetimeFigureOut">
               <a:rPr lang="en-US" smtClean="0"/>
-              <a:t>9/25/26</a:t>
+              <a:t>10/14/26</a:t>
             </a:fld>
             <a:endParaRPr lang="en-US"/>
           </a:p>
@@ -1187,7 +1190,7 @@
           <a:p>
             <a:fld id="{2160428C-B2E7-3E4C-BEA2-61A621D3A559}" type="datetimeFigureOut">
               <a:rPr lang="en-US" smtClean="0"/>
-              <a:t>9/25/26</a:t>
+              <a:t>10/14/26</a:t>
             </a:fld>
             <a:endParaRPr lang="en-US"/>
           </a:p>
@@ -1387,7 +1390,7 @@
           <a:p>
             <a:fld id="{2160428C-B2E7-3E4C-BEA2-61A621D3A559}" type="datetimeFigureOut">
               <a:rPr lang="en-US" smtClean="0"/>
-              <a:t>9/25/26</a:t>
+              <a:t>10/14/26</a:t>
             </a:fld>
             <a:endParaRPr lang="en-US"/>
           </a:p>
@@ -1597,7 +1600,7 @@
           <a:p>
             <a:fld id="{2160428C-B2E7-3E4C-BEA2-61A621D3A559}" type="datetimeFigureOut">
               <a:rPr lang="en-US" smtClean="0"/>
-              <a:t>9/25/26</a:t>
+              <a:t>10/14/26</a:t>
             </a:fld>
             <a:endParaRPr lang="en-US"/>
           </a:p>
@@ -1797,7 +1800,7 @@
           <a:p>
             <a:fld id="{2160428C-B2E7-3E4C-BEA2-61A621D3A559}" type="datetimeFigureOut">
               <a:rPr lang="en-US" smtClean="0"/>
-              <a:t>9/25/26</a:t>
+              <a:t>10/14/26</a:t>
             </a:fld>
             <a:endParaRPr lang="en-US"/>
           </a:p>
@@ -2073,7 +2076,7 @@
           <a:p>
             <a:fld id="{2160428C-B2E7-3E4C-BEA2-61A621D3A559}" type="datetimeFigureOut">
               <a:rPr lang="en-US" smtClean="0"/>
-              <a:t>9/25/26</a:t>
+              <a:t>10/14/26</a:t>
             </a:fld>
             <a:endParaRPr lang="en-US"/>
           </a:p>
@@ -2341,7 +2344,7 @@
           <a:p>
             <a:fld id="{2160428C-B2E7-3E4C-BEA2-61A621D3A559}" type="datetimeFigureOut">
               <a:rPr lang="en-US" smtClean="0"/>
-              <a:t>9/25/26</a:t>
+              <a:t>10/14/26</a:t>
             </a:fld>
             <a:endParaRPr lang="en-US"/>
           </a:p>
@@ -2756,7 +2759,7 @@
           <a:p>
             <a:fld id="{2160428C-B2E7-3E4C-BEA2-61A621D3A559}" type="datetimeFigureOut">
               <a:rPr lang="en-US" smtClean="0"/>
-              <a:t>9/25/26</a:t>
+              <a:t>10/14/26</a:t>
             </a:fld>
             <a:endParaRPr lang="en-US"/>
           </a:p>
@@ -2898,7 +2901,7 @@
           <a:p>
             <a:fld id="{2160428C-B2E7-3E4C-BEA2-61A621D3A559}" type="datetimeFigureOut">
               <a:rPr lang="en-US" smtClean="0"/>
-              <a:t>9/25/26</a:t>
+              <a:t>10/14/26</a:t>
             </a:fld>
             <a:endParaRPr lang="en-US"/>
           </a:p>
@@ -3011,7 +3014,7 @@
           <a:p>
             <a:fld id="{2160428C-B2E7-3E4C-BEA2-61A621D3A559}" type="datetimeFigureOut">
               <a:rPr lang="en-US" smtClean="0"/>
-              <a:t>9/25/26</a:t>
+              <a:t>10/14/26</a:t>
             </a:fld>
             <a:endParaRPr lang="en-US"/>
           </a:p>
@@ -3324,7 +3327,7 @@
           <a:p>
             <a:fld id="{2160428C-B2E7-3E4C-BEA2-61A621D3A559}" type="datetimeFigureOut">
               <a:rPr lang="en-US" smtClean="0"/>
-              <a:t>9/25/26</a:t>
+              <a:t>10/14/26</a:t>
             </a:fld>
             <a:endParaRPr lang="en-US"/>
           </a:p>
@@ -3613,7 +3616,7 @@
           <a:p>
             <a:fld id="{2160428C-B2E7-3E4C-BEA2-61A621D3A559}" type="datetimeFigureOut">
               <a:rPr lang="en-US" smtClean="0"/>
-              <a:t>9/25/26</a:t>
+              <a:t>10/14/26</a:t>
             </a:fld>
             <a:endParaRPr lang="en-US"/>
           </a:p>
@@ -3856,7 +3859,7 @@
           <a:p>
             <a:fld id="{2160428C-B2E7-3E4C-BEA2-61A621D3A559}" type="datetimeFigureOut">
               <a:rPr lang="en-US" smtClean="0"/>
-              <a:t>9/25/26</a:t>
+              <a:t>10/14/26</a:t>
             </a:fld>
             <a:endParaRPr lang="en-US"/>
           </a:p>
@@ -6033,14 +6036,32 @@
           <a:p>
             <a:r>
               <a:rPr lang="en-US" dirty="0"/>
-              <a:t>float</a:t>
-            </a:r>
-          </a:p>
-          <a:p>
-            <a:pPr marL="0" indent="0">
-              <a:buNone/>
-            </a:pPr>
-            <a:endParaRPr lang="en-US" dirty="0"/>
+              <a:t>Float and Clears</a:t>
+            </a:r>
+          </a:p>
+          <a:p>
+            <a:r>
+              <a:rPr lang="en-US" dirty="0"/>
+              <a:t>Columns</a:t>
+            </a:r>
+          </a:p>
+          <a:p>
+            <a:r>
+              <a:rPr lang="en-US" dirty="0"/>
+              <a:t>Multicolumn without Grid or Flexbox</a:t>
+            </a:r>
+          </a:p>
+          <a:p>
+            <a:r>
+              <a:rPr lang="en-US" dirty="0"/>
+              <a:t>Position Property – Absolute, Relative, Fixed, Sticky</a:t>
+            </a:r>
+          </a:p>
+          <a:p>
+            <a:r>
+              <a:rPr lang="en-US" dirty="0"/>
+              <a:t>Grid Layout</a:t>
+            </a:r>
           </a:p>
           <a:p>
             <a:endParaRPr lang="en-US" dirty="0"/>
@@ -6105,6 +6126,1075 @@
     <p:extLst>
       <p:ext uri="{BB962C8B-B14F-4D97-AF65-F5344CB8AC3E}">
         <p14:creationId xmlns:p14="http://schemas.microsoft.com/office/powerpoint/2010/main" val="589694005"/>
+      </p:ext>
+    </p:extLst>
+  </p:cSld>
+  <p:clrMapOvr>
+    <a:masterClrMapping/>
+  </p:clrMapOvr>
+</p:sld>
+</file>
+
+<file path=ppt/slides/slide15.xml><?xml version="1.0" encoding="utf-8"?>
+<p:sld xmlns:a="http://schemas.openxmlformats.org/drawingml/2006/main" xmlns:r="http://schemas.openxmlformats.org/officeDocument/2006/relationships" xmlns:p="http://schemas.openxmlformats.org/presentationml/2006/main">
+  <p:cSld>
+    <p:spTree>
+      <p:nvGrpSpPr>
+        <p:cNvPr id="1" name=""/>
+        <p:cNvGrpSpPr/>
+        <p:nvPr/>
+      </p:nvGrpSpPr>
+      <p:grpSpPr>
+        <a:xfrm>
+          <a:off x="0" y="0"/>
+          <a:ext cx="0" cy="0"/>
+          <a:chOff x="0" y="0"/>
+          <a:chExt cx="0" cy="0"/>
+        </a:xfrm>
+      </p:grpSpPr>
+      <p:sp>
+        <p:nvSpPr>
+          <p:cNvPr id="2" name="Title 1">
+            <a:extLst>
+              <a:ext uri="{FF2B5EF4-FFF2-40B4-BE49-F238E27FC236}">
+                <a16:creationId xmlns:a16="http://schemas.microsoft.com/office/drawing/2014/main" id="{03AF8264-55C8-8445-7419-EC3820211C1B}"/>
+              </a:ext>
+            </a:extLst>
+          </p:cNvPr>
+          <p:cNvSpPr>
+            <a:spLocks noGrp="1"/>
+          </p:cNvSpPr>
+          <p:nvPr>
+            <p:ph type="title"/>
+          </p:nvPr>
+        </p:nvSpPr>
+        <p:spPr>
+          <a:xfrm>
+            <a:off x="838200" y="365125"/>
+            <a:ext cx="2681797" cy="877749"/>
+          </a:xfrm>
+        </p:spPr>
+        <p:txBody>
+          <a:bodyPr>
+            <a:normAutofit fontScale="90000"/>
+          </a:bodyPr>
+          <a:lstStyle/>
+          <a:p>
+            <a:r>
+              <a:rPr lang="en-US" dirty="0"/>
+              <a:t>Grid Layout</a:t>
+            </a:r>
+          </a:p>
+        </p:txBody>
+      </p:sp>
+      <p:sp>
+        <p:nvSpPr>
+          <p:cNvPr id="4" name="Rectangle 3">
+            <a:extLst>
+              <a:ext uri="{FF2B5EF4-FFF2-40B4-BE49-F238E27FC236}">
+                <a16:creationId xmlns:a16="http://schemas.microsoft.com/office/drawing/2014/main" id="{28934BB1-BD3B-30F6-ED98-A3D9A5B9A616}"/>
+              </a:ext>
+            </a:extLst>
+          </p:cNvPr>
+          <p:cNvSpPr/>
+          <p:nvPr/>
+        </p:nvSpPr>
+        <p:spPr>
+          <a:xfrm>
+            <a:off x="1995996" y="1589104"/>
+            <a:ext cx="7923319" cy="3879542"/>
+          </a:xfrm>
+          <a:prstGeom prst="rect">
+            <a:avLst/>
+          </a:prstGeom>
+        </p:spPr>
+        <p:style>
+          <a:lnRef idx="2">
+            <a:schemeClr val="accent1">
+              <a:shade val="15000"/>
+            </a:schemeClr>
+          </a:lnRef>
+          <a:fillRef idx="1">
+            <a:schemeClr val="accent1"/>
+          </a:fillRef>
+          <a:effectRef idx="0">
+            <a:schemeClr val="accent1"/>
+          </a:effectRef>
+          <a:fontRef idx="minor">
+            <a:schemeClr val="lt1"/>
+          </a:fontRef>
+        </p:style>
+        <p:txBody>
+          <a:bodyPr rtlCol="0" anchor="ctr"/>
+          <a:lstStyle/>
+          <a:p>
+            <a:pPr algn="ctr"/>
+            <a:endParaRPr lang="en-US"/>
+          </a:p>
+        </p:txBody>
+      </p:sp>
+      <p:sp>
+        <p:nvSpPr>
+          <p:cNvPr id="5" name="Rectangle 4">
+            <a:extLst>
+              <a:ext uri="{FF2B5EF4-FFF2-40B4-BE49-F238E27FC236}">
+                <a16:creationId xmlns:a16="http://schemas.microsoft.com/office/drawing/2014/main" id="{AA296BE8-F047-9BDB-4A32-324E9832112A}"/>
+              </a:ext>
+            </a:extLst>
+          </p:cNvPr>
+          <p:cNvSpPr/>
+          <p:nvPr/>
+        </p:nvSpPr>
+        <p:spPr>
+          <a:xfrm>
+            <a:off x="2018191" y="1589104"/>
+            <a:ext cx="2334827" cy="1766656"/>
+          </a:xfrm>
+          <a:prstGeom prst="rect">
+            <a:avLst/>
+          </a:prstGeom>
+          <a:solidFill>
+            <a:schemeClr val="accent2"/>
+          </a:solidFill>
+        </p:spPr>
+        <p:style>
+          <a:lnRef idx="2">
+            <a:schemeClr val="accent1">
+              <a:shade val="15000"/>
+            </a:schemeClr>
+          </a:lnRef>
+          <a:fillRef idx="1">
+            <a:schemeClr val="accent1"/>
+          </a:fillRef>
+          <a:effectRef idx="0">
+            <a:schemeClr val="accent1"/>
+          </a:effectRef>
+          <a:fontRef idx="minor">
+            <a:schemeClr val="lt1"/>
+          </a:fontRef>
+        </p:style>
+        <p:txBody>
+          <a:bodyPr rtlCol="0" anchor="ctr"/>
+          <a:lstStyle/>
+          <a:p>
+            <a:pPr algn="ctr"/>
+            <a:r>
+              <a:rPr lang="en-US" dirty="0"/>
+              <a:t>1</a:t>
+            </a:r>
+          </a:p>
+        </p:txBody>
+      </p:sp>
+      <p:sp>
+        <p:nvSpPr>
+          <p:cNvPr id="6" name="Rectangle 5">
+            <a:extLst>
+              <a:ext uri="{FF2B5EF4-FFF2-40B4-BE49-F238E27FC236}">
+                <a16:creationId xmlns:a16="http://schemas.microsoft.com/office/drawing/2014/main" id="{E401EB87-30AD-9EE2-3030-570E56F5DE4B}"/>
+              </a:ext>
+            </a:extLst>
+          </p:cNvPr>
+          <p:cNvSpPr/>
+          <p:nvPr/>
+        </p:nvSpPr>
+        <p:spPr>
+          <a:xfrm>
+            <a:off x="4950780" y="1589104"/>
+            <a:ext cx="2334827" cy="1766656"/>
+          </a:xfrm>
+          <a:prstGeom prst="rect">
+            <a:avLst/>
+          </a:prstGeom>
+          <a:solidFill>
+            <a:schemeClr val="accent2"/>
+          </a:solidFill>
+        </p:spPr>
+        <p:style>
+          <a:lnRef idx="2">
+            <a:schemeClr val="accent1">
+              <a:shade val="15000"/>
+            </a:schemeClr>
+          </a:lnRef>
+          <a:fillRef idx="1">
+            <a:schemeClr val="accent1"/>
+          </a:fillRef>
+          <a:effectRef idx="0">
+            <a:schemeClr val="accent1"/>
+          </a:effectRef>
+          <a:fontRef idx="minor">
+            <a:schemeClr val="lt1"/>
+          </a:fontRef>
+        </p:style>
+        <p:txBody>
+          <a:bodyPr rtlCol="0" anchor="ctr"/>
+          <a:lstStyle/>
+          <a:p>
+            <a:pPr algn="ctr"/>
+            <a:r>
+              <a:rPr lang="en-US" dirty="0"/>
+              <a:t>2</a:t>
+            </a:r>
+          </a:p>
+        </p:txBody>
+      </p:sp>
+      <p:sp>
+        <p:nvSpPr>
+          <p:cNvPr id="7" name="Rectangle 6">
+            <a:extLst>
+              <a:ext uri="{FF2B5EF4-FFF2-40B4-BE49-F238E27FC236}">
+                <a16:creationId xmlns:a16="http://schemas.microsoft.com/office/drawing/2014/main" id="{EA95081F-2463-6F83-6262-57D4C0733171}"/>
+              </a:ext>
+            </a:extLst>
+          </p:cNvPr>
+          <p:cNvSpPr/>
+          <p:nvPr/>
+        </p:nvSpPr>
+        <p:spPr>
+          <a:xfrm>
+            <a:off x="7584489" y="1589104"/>
+            <a:ext cx="2334827" cy="1766656"/>
+          </a:xfrm>
+          <a:prstGeom prst="rect">
+            <a:avLst/>
+          </a:prstGeom>
+          <a:solidFill>
+            <a:schemeClr val="accent2"/>
+          </a:solidFill>
+        </p:spPr>
+        <p:style>
+          <a:lnRef idx="2">
+            <a:schemeClr val="accent1">
+              <a:shade val="15000"/>
+            </a:schemeClr>
+          </a:lnRef>
+          <a:fillRef idx="1">
+            <a:schemeClr val="accent1"/>
+          </a:fillRef>
+          <a:effectRef idx="0">
+            <a:schemeClr val="accent1"/>
+          </a:effectRef>
+          <a:fontRef idx="minor">
+            <a:schemeClr val="lt1"/>
+          </a:fontRef>
+        </p:style>
+        <p:txBody>
+          <a:bodyPr rtlCol="0" anchor="ctr"/>
+          <a:lstStyle/>
+          <a:p>
+            <a:pPr algn="ctr"/>
+            <a:r>
+              <a:rPr lang="en-US" dirty="0"/>
+              <a:t>3</a:t>
+            </a:r>
+          </a:p>
+        </p:txBody>
+      </p:sp>
+      <p:sp>
+        <p:nvSpPr>
+          <p:cNvPr id="8" name="Rectangle 7">
+            <a:extLst>
+              <a:ext uri="{FF2B5EF4-FFF2-40B4-BE49-F238E27FC236}">
+                <a16:creationId xmlns:a16="http://schemas.microsoft.com/office/drawing/2014/main" id="{594C7D20-AE51-3E8E-D702-3B31D2E7B42F}"/>
+              </a:ext>
+            </a:extLst>
+          </p:cNvPr>
+          <p:cNvSpPr/>
+          <p:nvPr/>
+        </p:nvSpPr>
+        <p:spPr>
+          <a:xfrm>
+            <a:off x="1995997" y="3701990"/>
+            <a:ext cx="2334827" cy="1766656"/>
+          </a:xfrm>
+          <a:prstGeom prst="rect">
+            <a:avLst/>
+          </a:prstGeom>
+          <a:solidFill>
+            <a:schemeClr val="accent2"/>
+          </a:solidFill>
+        </p:spPr>
+        <p:style>
+          <a:lnRef idx="2">
+            <a:schemeClr val="accent1">
+              <a:shade val="15000"/>
+            </a:schemeClr>
+          </a:lnRef>
+          <a:fillRef idx="1">
+            <a:schemeClr val="accent1"/>
+          </a:fillRef>
+          <a:effectRef idx="0">
+            <a:schemeClr val="accent1"/>
+          </a:effectRef>
+          <a:fontRef idx="minor">
+            <a:schemeClr val="lt1"/>
+          </a:fontRef>
+        </p:style>
+        <p:txBody>
+          <a:bodyPr rtlCol="0" anchor="ctr"/>
+          <a:lstStyle/>
+          <a:p>
+            <a:pPr algn="ctr"/>
+            <a:r>
+              <a:rPr lang="en-US" dirty="0"/>
+              <a:t>4</a:t>
+            </a:r>
+          </a:p>
+        </p:txBody>
+      </p:sp>
+      <p:sp>
+        <p:nvSpPr>
+          <p:cNvPr id="9" name="Rectangle 8">
+            <a:extLst>
+              <a:ext uri="{FF2B5EF4-FFF2-40B4-BE49-F238E27FC236}">
+                <a16:creationId xmlns:a16="http://schemas.microsoft.com/office/drawing/2014/main" id="{B96FCB10-886F-C036-EB0A-85B3CF51D489}"/>
+              </a:ext>
+            </a:extLst>
+          </p:cNvPr>
+          <p:cNvSpPr/>
+          <p:nvPr/>
+        </p:nvSpPr>
+        <p:spPr>
+          <a:xfrm>
+            <a:off x="4928586" y="3701990"/>
+            <a:ext cx="2334827" cy="1766656"/>
+          </a:xfrm>
+          <a:prstGeom prst="rect">
+            <a:avLst/>
+          </a:prstGeom>
+          <a:solidFill>
+            <a:schemeClr val="accent2"/>
+          </a:solidFill>
+        </p:spPr>
+        <p:style>
+          <a:lnRef idx="2">
+            <a:schemeClr val="accent1">
+              <a:shade val="15000"/>
+            </a:schemeClr>
+          </a:lnRef>
+          <a:fillRef idx="1">
+            <a:schemeClr val="accent1"/>
+          </a:fillRef>
+          <a:effectRef idx="0">
+            <a:schemeClr val="accent1"/>
+          </a:effectRef>
+          <a:fontRef idx="minor">
+            <a:schemeClr val="lt1"/>
+          </a:fontRef>
+        </p:style>
+        <p:txBody>
+          <a:bodyPr rtlCol="0" anchor="ctr"/>
+          <a:lstStyle/>
+          <a:p>
+            <a:pPr algn="ctr"/>
+            <a:r>
+              <a:rPr lang="en-US" dirty="0"/>
+              <a:t>5</a:t>
+            </a:r>
+          </a:p>
+        </p:txBody>
+      </p:sp>
+      <p:sp>
+        <p:nvSpPr>
+          <p:cNvPr id="10" name="Rectangle 9">
+            <a:extLst>
+              <a:ext uri="{FF2B5EF4-FFF2-40B4-BE49-F238E27FC236}">
+                <a16:creationId xmlns:a16="http://schemas.microsoft.com/office/drawing/2014/main" id="{529C45A6-C2AB-B316-C5A2-659B1D87FC2E}"/>
+              </a:ext>
+            </a:extLst>
+          </p:cNvPr>
+          <p:cNvSpPr/>
+          <p:nvPr/>
+        </p:nvSpPr>
+        <p:spPr>
+          <a:xfrm>
+            <a:off x="7562295" y="3701990"/>
+            <a:ext cx="2334827" cy="1766656"/>
+          </a:xfrm>
+          <a:prstGeom prst="rect">
+            <a:avLst/>
+          </a:prstGeom>
+          <a:solidFill>
+            <a:schemeClr val="accent2"/>
+          </a:solidFill>
+        </p:spPr>
+        <p:style>
+          <a:lnRef idx="2">
+            <a:schemeClr val="accent1">
+              <a:shade val="15000"/>
+            </a:schemeClr>
+          </a:lnRef>
+          <a:fillRef idx="1">
+            <a:schemeClr val="accent1"/>
+          </a:fillRef>
+          <a:effectRef idx="0">
+            <a:schemeClr val="accent1"/>
+          </a:effectRef>
+          <a:fontRef idx="minor">
+            <a:schemeClr val="lt1"/>
+          </a:fontRef>
+        </p:style>
+        <p:txBody>
+          <a:bodyPr rtlCol="0" anchor="ctr"/>
+          <a:lstStyle/>
+          <a:p>
+            <a:pPr algn="ctr"/>
+            <a:r>
+              <a:rPr lang="en-US" dirty="0"/>
+              <a:t>6</a:t>
+            </a:r>
+          </a:p>
+        </p:txBody>
+      </p:sp>
+      <p:cxnSp>
+        <p:nvCxnSpPr>
+          <p:cNvPr id="12" name="Straight Arrow Connector 11">
+            <a:extLst>
+              <a:ext uri="{FF2B5EF4-FFF2-40B4-BE49-F238E27FC236}">
+                <a16:creationId xmlns:a16="http://schemas.microsoft.com/office/drawing/2014/main" id="{C2EFD19B-8055-13F6-3E50-9CABBB4D7835}"/>
+              </a:ext>
+            </a:extLst>
+          </p:cNvPr>
+          <p:cNvCxnSpPr/>
+          <p:nvPr/>
+        </p:nvCxnSpPr>
+        <p:spPr>
+          <a:xfrm>
+            <a:off x="1198485" y="2938509"/>
+            <a:ext cx="1358284" cy="0"/>
+          </a:xfrm>
+          <a:prstGeom prst="straightConnector1">
+            <a:avLst/>
+          </a:prstGeom>
+          <a:ln>
+            <a:tailEnd type="triangle"/>
+          </a:ln>
+        </p:spPr>
+        <p:style>
+          <a:lnRef idx="2">
+            <a:schemeClr val="dk1"/>
+          </a:lnRef>
+          <a:fillRef idx="0">
+            <a:schemeClr val="dk1"/>
+          </a:fillRef>
+          <a:effectRef idx="1">
+            <a:schemeClr val="dk1"/>
+          </a:effectRef>
+          <a:fontRef idx="minor">
+            <a:schemeClr val="tx1"/>
+          </a:fontRef>
+        </p:style>
+      </p:cxnSp>
+      <p:cxnSp>
+        <p:nvCxnSpPr>
+          <p:cNvPr id="14" name="Straight Arrow Connector 13">
+            <a:extLst>
+              <a:ext uri="{FF2B5EF4-FFF2-40B4-BE49-F238E27FC236}">
+                <a16:creationId xmlns:a16="http://schemas.microsoft.com/office/drawing/2014/main" id="{40A6688F-300F-3B5F-5FB5-BA513D6576D6}"/>
+              </a:ext>
+            </a:extLst>
+          </p:cNvPr>
+          <p:cNvCxnSpPr/>
+          <p:nvPr/>
+        </p:nvCxnSpPr>
+        <p:spPr>
+          <a:xfrm flipH="1">
+            <a:off x="3826276" y="923278"/>
+            <a:ext cx="79899" cy="1065320"/>
+          </a:xfrm>
+          <a:prstGeom prst="straightConnector1">
+            <a:avLst/>
+          </a:prstGeom>
+          <a:ln>
+            <a:tailEnd type="triangle"/>
+          </a:ln>
+        </p:spPr>
+        <p:style>
+          <a:lnRef idx="2">
+            <a:schemeClr val="dk1"/>
+          </a:lnRef>
+          <a:fillRef idx="0">
+            <a:schemeClr val="dk1"/>
+          </a:fillRef>
+          <a:effectRef idx="1">
+            <a:schemeClr val="dk1"/>
+          </a:effectRef>
+          <a:fontRef idx="minor">
+            <a:schemeClr val="tx1"/>
+          </a:fontRef>
+        </p:style>
+      </p:cxnSp>
+      <p:cxnSp>
+        <p:nvCxnSpPr>
+          <p:cNvPr id="18" name="Straight Arrow Connector 17">
+            <a:extLst>
+              <a:ext uri="{FF2B5EF4-FFF2-40B4-BE49-F238E27FC236}">
+                <a16:creationId xmlns:a16="http://schemas.microsoft.com/office/drawing/2014/main" id="{5E310C01-37E6-37FA-EAB3-533C186664DF}"/>
+              </a:ext>
+            </a:extLst>
+          </p:cNvPr>
+          <p:cNvCxnSpPr/>
+          <p:nvPr/>
+        </p:nvCxnSpPr>
+        <p:spPr>
+          <a:xfrm flipH="1">
+            <a:off x="6329779" y="1145219"/>
+            <a:ext cx="523782" cy="985422"/>
+          </a:xfrm>
+          <a:prstGeom prst="straightConnector1">
+            <a:avLst/>
+          </a:prstGeom>
+          <a:ln>
+            <a:tailEnd type="triangle"/>
+          </a:ln>
+        </p:spPr>
+        <p:style>
+          <a:lnRef idx="2">
+            <a:schemeClr val="dk1"/>
+          </a:lnRef>
+          <a:fillRef idx="0">
+            <a:schemeClr val="dk1"/>
+          </a:fillRef>
+          <a:effectRef idx="1">
+            <a:schemeClr val="dk1"/>
+          </a:effectRef>
+          <a:fontRef idx="minor">
+            <a:schemeClr val="tx1"/>
+          </a:fontRef>
+        </p:style>
+      </p:cxnSp>
+      <p:cxnSp>
+        <p:nvCxnSpPr>
+          <p:cNvPr id="20" name="Straight Arrow Connector 19">
+            <a:extLst>
+              <a:ext uri="{FF2B5EF4-FFF2-40B4-BE49-F238E27FC236}">
+                <a16:creationId xmlns:a16="http://schemas.microsoft.com/office/drawing/2014/main" id="{6CDB28B8-B6B8-71B8-D87E-737E7337FD77}"/>
+              </a:ext>
+            </a:extLst>
+          </p:cNvPr>
+          <p:cNvCxnSpPr/>
+          <p:nvPr/>
+        </p:nvCxnSpPr>
+        <p:spPr>
+          <a:xfrm flipH="1">
+            <a:off x="9897122" y="1589104"/>
+            <a:ext cx="22193" cy="4474345"/>
+          </a:xfrm>
+          <a:prstGeom prst="straightConnector1">
+            <a:avLst/>
+          </a:prstGeom>
+          <a:ln>
+            <a:tailEnd type="triangle"/>
+          </a:ln>
+        </p:spPr>
+        <p:style>
+          <a:lnRef idx="2">
+            <a:schemeClr val="dk1"/>
+          </a:lnRef>
+          <a:fillRef idx="0">
+            <a:schemeClr val="dk1"/>
+          </a:fillRef>
+          <a:effectRef idx="1">
+            <a:schemeClr val="dk1"/>
+          </a:effectRef>
+          <a:fontRef idx="minor">
+            <a:schemeClr val="tx1"/>
+          </a:fontRef>
+        </p:style>
+      </p:cxnSp>
+      <p:cxnSp>
+        <p:nvCxnSpPr>
+          <p:cNvPr id="22" name="Straight Arrow Connector 21">
+            <a:extLst>
+              <a:ext uri="{FF2B5EF4-FFF2-40B4-BE49-F238E27FC236}">
+                <a16:creationId xmlns:a16="http://schemas.microsoft.com/office/drawing/2014/main" id="{AD988306-D0B8-8DEE-CBB6-74E51EFB5595}"/>
+              </a:ext>
+            </a:extLst>
+          </p:cNvPr>
+          <p:cNvCxnSpPr/>
+          <p:nvPr/>
+        </p:nvCxnSpPr>
+        <p:spPr>
+          <a:xfrm flipH="1">
+            <a:off x="9268287" y="3515557"/>
+            <a:ext cx="1890944" cy="0"/>
+          </a:xfrm>
+          <a:prstGeom prst="straightConnector1">
+            <a:avLst/>
+          </a:prstGeom>
+          <a:ln>
+            <a:tailEnd type="triangle"/>
+          </a:ln>
+        </p:spPr>
+        <p:style>
+          <a:lnRef idx="2">
+            <a:schemeClr val="dk1"/>
+          </a:lnRef>
+          <a:fillRef idx="0">
+            <a:schemeClr val="dk1"/>
+          </a:fillRef>
+          <a:effectRef idx="1">
+            <a:schemeClr val="dk1"/>
+          </a:effectRef>
+          <a:fontRef idx="minor">
+            <a:schemeClr val="tx1"/>
+          </a:fontRef>
+        </p:style>
+      </p:cxnSp>
+      <p:sp>
+        <p:nvSpPr>
+          <p:cNvPr id="23" name="TextBox 22">
+            <a:extLst>
+              <a:ext uri="{FF2B5EF4-FFF2-40B4-BE49-F238E27FC236}">
+                <a16:creationId xmlns:a16="http://schemas.microsoft.com/office/drawing/2014/main" id="{6F3C6A77-CDE8-6047-7FCD-2F3CE23F982E}"/>
+              </a:ext>
+            </a:extLst>
+          </p:cNvPr>
+          <p:cNvSpPr txBox="1"/>
+          <p:nvPr/>
+        </p:nvSpPr>
+        <p:spPr>
+          <a:xfrm>
+            <a:off x="3519997" y="684437"/>
+            <a:ext cx="944489" cy="369332"/>
+          </a:xfrm>
+          <a:prstGeom prst="rect">
+            <a:avLst/>
+          </a:prstGeom>
+          <a:noFill/>
+        </p:spPr>
+        <p:txBody>
+          <a:bodyPr wrap="none" rtlCol="0">
+            <a:spAutoFit/>
+          </a:bodyPr>
+          <a:lstStyle/>
+          <a:p>
+            <a:r>
+              <a:rPr lang="en-US" dirty="0"/>
+              <a:t>column</a:t>
+            </a:r>
+          </a:p>
+        </p:txBody>
+      </p:sp>
+      <p:sp>
+        <p:nvSpPr>
+          <p:cNvPr id="24" name="TextBox 23">
+            <a:extLst>
+              <a:ext uri="{FF2B5EF4-FFF2-40B4-BE49-F238E27FC236}">
+                <a16:creationId xmlns:a16="http://schemas.microsoft.com/office/drawing/2014/main" id="{9176C6CF-874E-CCEE-E043-AA94F215A531}"/>
+              </a:ext>
+            </a:extLst>
+          </p:cNvPr>
+          <p:cNvSpPr txBox="1"/>
+          <p:nvPr/>
+        </p:nvSpPr>
+        <p:spPr>
+          <a:xfrm>
+            <a:off x="236734" y="2753843"/>
+            <a:ext cx="615233" cy="369332"/>
+          </a:xfrm>
+          <a:prstGeom prst="rect">
+            <a:avLst/>
+          </a:prstGeom>
+          <a:noFill/>
+        </p:spPr>
+        <p:txBody>
+          <a:bodyPr wrap="none" rtlCol="0">
+            <a:spAutoFit/>
+          </a:bodyPr>
+          <a:lstStyle/>
+          <a:p>
+            <a:r>
+              <a:rPr lang="en-US" dirty="0"/>
+              <a:t>Row</a:t>
+            </a:r>
+          </a:p>
+        </p:txBody>
+      </p:sp>
+      <p:sp>
+        <p:nvSpPr>
+          <p:cNvPr id="25" name="TextBox 24">
+            <a:extLst>
+              <a:ext uri="{FF2B5EF4-FFF2-40B4-BE49-F238E27FC236}">
+                <a16:creationId xmlns:a16="http://schemas.microsoft.com/office/drawing/2014/main" id="{D350833C-86CE-DFC7-A506-2FD56E7D0A9D}"/>
+              </a:ext>
+            </a:extLst>
+          </p:cNvPr>
+          <p:cNvSpPr txBox="1"/>
+          <p:nvPr/>
+        </p:nvSpPr>
+        <p:spPr>
+          <a:xfrm>
+            <a:off x="6513252" y="861991"/>
+            <a:ext cx="546945" cy="369332"/>
+          </a:xfrm>
+          <a:prstGeom prst="rect">
+            <a:avLst/>
+          </a:prstGeom>
+          <a:noFill/>
+        </p:spPr>
+        <p:txBody>
+          <a:bodyPr wrap="none" rtlCol="0">
+            <a:spAutoFit/>
+          </a:bodyPr>
+          <a:lstStyle/>
+          <a:p>
+            <a:r>
+              <a:rPr lang="en-US" dirty="0"/>
+              <a:t>cell</a:t>
+            </a:r>
+          </a:p>
+        </p:txBody>
+      </p:sp>
+      <p:sp>
+        <p:nvSpPr>
+          <p:cNvPr id="26" name="TextBox 25">
+            <a:extLst>
+              <a:ext uri="{FF2B5EF4-FFF2-40B4-BE49-F238E27FC236}">
+                <a16:creationId xmlns:a16="http://schemas.microsoft.com/office/drawing/2014/main" id="{3C6FE8F3-BEDE-29A8-3AB8-729BB51ACF36}"/>
+              </a:ext>
+            </a:extLst>
+          </p:cNvPr>
+          <p:cNvSpPr txBox="1"/>
+          <p:nvPr/>
+        </p:nvSpPr>
+        <p:spPr>
+          <a:xfrm>
+            <a:off x="11117802" y="3323780"/>
+            <a:ext cx="824713" cy="369332"/>
+          </a:xfrm>
+          <a:prstGeom prst="rect">
+            <a:avLst/>
+          </a:prstGeom>
+          <a:noFill/>
+        </p:spPr>
+        <p:txBody>
+          <a:bodyPr wrap="none" rtlCol="0">
+            <a:spAutoFit/>
+          </a:bodyPr>
+          <a:lstStyle/>
+          <a:p>
+            <a:r>
+              <a:rPr lang="en-US" dirty="0"/>
+              <a:t>Gutter</a:t>
+            </a:r>
+          </a:p>
+        </p:txBody>
+      </p:sp>
+      <p:sp>
+        <p:nvSpPr>
+          <p:cNvPr id="27" name="TextBox 26">
+            <a:extLst>
+              <a:ext uri="{FF2B5EF4-FFF2-40B4-BE49-F238E27FC236}">
+                <a16:creationId xmlns:a16="http://schemas.microsoft.com/office/drawing/2014/main" id="{4F91A44B-0C67-01B6-D2CB-8DF8293C5CB5}"/>
+              </a:ext>
+            </a:extLst>
+          </p:cNvPr>
+          <p:cNvSpPr txBox="1"/>
+          <p:nvPr/>
+        </p:nvSpPr>
+        <p:spPr>
+          <a:xfrm>
+            <a:off x="9424877" y="6003981"/>
+            <a:ext cx="1074333" cy="369332"/>
+          </a:xfrm>
+          <a:prstGeom prst="rect">
+            <a:avLst/>
+          </a:prstGeom>
+          <a:noFill/>
+        </p:spPr>
+        <p:txBody>
+          <a:bodyPr wrap="none" rtlCol="0">
+            <a:spAutoFit/>
+          </a:bodyPr>
+          <a:lstStyle/>
+          <a:p>
+            <a:r>
+              <a:rPr lang="en-US" dirty="0"/>
+              <a:t>Grid Line</a:t>
+            </a:r>
+          </a:p>
+        </p:txBody>
+      </p:sp>
+    </p:spTree>
+    <p:extLst>
+      <p:ext uri="{BB962C8B-B14F-4D97-AF65-F5344CB8AC3E}">
+        <p14:creationId xmlns:p14="http://schemas.microsoft.com/office/powerpoint/2010/main" val="1049742979"/>
+      </p:ext>
+    </p:extLst>
+  </p:cSld>
+  <p:clrMapOvr>
+    <a:masterClrMapping/>
+  </p:clrMapOvr>
+</p:sld>
+</file>
+
+<file path=ppt/slides/slide16.xml><?xml version="1.0" encoding="utf-8"?>
+<p:sld xmlns:a="http://schemas.openxmlformats.org/drawingml/2006/main" xmlns:r="http://schemas.openxmlformats.org/officeDocument/2006/relationships" xmlns:p="http://schemas.openxmlformats.org/presentationml/2006/main">
+  <p:cSld>
+    <p:spTree>
+      <p:nvGrpSpPr>
+        <p:cNvPr id="1" name=""/>
+        <p:cNvGrpSpPr/>
+        <p:nvPr/>
+      </p:nvGrpSpPr>
+      <p:grpSpPr>
+        <a:xfrm>
+          <a:off x="0" y="0"/>
+          <a:ext cx="0" cy="0"/>
+          <a:chOff x="0" y="0"/>
+          <a:chExt cx="0" cy="0"/>
+        </a:xfrm>
+      </p:grpSpPr>
+      <p:sp>
+        <p:nvSpPr>
+          <p:cNvPr id="2" name="Title 1">
+            <a:extLst>
+              <a:ext uri="{FF2B5EF4-FFF2-40B4-BE49-F238E27FC236}">
+                <a16:creationId xmlns:a16="http://schemas.microsoft.com/office/drawing/2014/main" id="{0B786B07-77A8-898D-D3D4-1D76FC49BDED}"/>
+              </a:ext>
+            </a:extLst>
+          </p:cNvPr>
+          <p:cNvSpPr>
+            <a:spLocks noGrp="1"/>
+          </p:cNvSpPr>
+          <p:nvPr>
+            <p:ph type="title"/>
+          </p:nvPr>
+        </p:nvSpPr>
+        <p:spPr/>
+        <p:txBody>
+          <a:bodyPr/>
+          <a:lstStyle/>
+          <a:p>
+            <a:endParaRPr lang="en-US"/>
+          </a:p>
+        </p:txBody>
+      </p:sp>
+      <p:sp>
+        <p:nvSpPr>
+          <p:cNvPr id="3" name="Content Placeholder 2">
+            <a:extLst>
+              <a:ext uri="{FF2B5EF4-FFF2-40B4-BE49-F238E27FC236}">
+                <a16:creationId xmlns:a16="http://schemas.microsoft.com/office/drawing/2014/main" id="{CD45DD71-C32B-FF61-F9D1-44C494442350}"/>
+              </a:ext>
+            </a:extLst>
+          </p:cNvPr>
+          <p:cNvSpPr>
+            <a:spLocks noGrp="1"/>
+          </p:cNvSpPr>
+          <p:nvPr>
+            <p:ph idx="1"/>
+          </p:nvPr>
+        </p:nvSpPr>
+        <p:spPr/>
+        <p:txBody>
+          <a:bodyPr/>
+          <a:lstStyle/>
+          <a:p>
+            <a:r>
+              <a:rPr lang="en-US" dirty="0"/>
+              <a:t>Width</a:t>
+            </a:r>
+          </a:p>
+          <a:p>
+            <a:r>
+              <a:rPr lang="en-US" dirty="0"/>
+              <a:t>Margin</a:t>
+            </a:r>
+          </a:p>
+          <a:p>
+            <a:r>
+              <a:rPr lang="en-US" dirty="0"/>
+              <a:t>Positioning</a:t>
+            </a:r>
+          </a:p>
+          <a:p>
+            <a:r>
+              <a:rPr lang="en-US" dirty="0"/>
+              <a:t>alignment</a:t>
+            </a:r>
+          </a:p>
+        </p:txBody>
+      </p:sp>
+    </p:spTree>
+    <p:extLst>
+      <p:ext uri="{BB962C8B-B14F-4D97-AF65-F5344CB8AC3E}">
+        <p14:creationId xmlns:p14="http://schemas.microsoft.com/office/powerpoint/2010/main" val="3877891819"/>
+      </p:ext>
+    </p:extLst>
+  </p:cSld>
+  <p:clrMapOvr>
+    <a:masterClrMapping/>
+  </p:clrMapOvr>
+</p:sld>
+</file>
+
+<file path=ppt/slides/slide17.xml><?xml version="1.0" encoding="utf-8"?>
+<p:sld xmlns:a="http://schemas.openxmlformats.org/drawingml/2006/main" xmlns:r="http://schemas.openxmlformats.org/officeDocument/2006/relationships" xmlns:p="http://schemas.openxmlformats.org/presentationml/2006/main">
+  <p:cSld>
+    <p:spTree>
+      <p:nvGrpSpPr>
+        <p:cNvPr id="1" name=""/>
+        <p:cNvGrpSpPr/>
+        <p:nvPr/>
+      </p:nvGrpSpPr>
+      <p:grpSpPr>
+        <a:xfrm>
+          <a:off x="0" y="0"/>
+          <a:ext cx="0" cy="0"/>
+          <a:chOff x="0" y="0"/>
+          <a:chExt cx="0" cy="0"/>
+        </a:xfrm>
+      </p:grpSpPr>
+      <p:sp>
+        <p:nvSpPr>
+          <p:cNvPr id="2" name="Title 1">
+            <a:extLst>
+              <a:ext uri="{FF2B5EF4-FFF2-40B4-BE49-F238E27FC236}">
+                <a16:creationId xmlns:a16="http://schemas.microsoft.com/office/drawing/2014/main" id="{CB6C0BE4-B48E-03CA-A94D-8DCF8A4D10E9}"/>
+              </a:ext>
+            </a:extLst>
+          </p:cNvPr>
+          <p:cNvSpPr>
+            <a:spLocks noGrp="1"/>
+          </p:cNvSpPr>
+          <p:nvPr>
+            <p:ph type="title"/>
+          </p:nvPr>
+        </p:nvSpPr>
+        <p:spPr/>
+        <p:txBody>
+          <a:bodyPr/>
+          <a:lstStyle/>
+          <a:p>
+            <a:endParaRPr lang="en-US"/>
+          </a:p>
+        </p:txBody>
+      </p:sp>
+      <p:sp>
+        <p:nvSpPr>
+          <p:cNvPr id="3" name="Content Placeholder 2">
+            <a:extLst>
+              <a:ext uri="{FF2B5EF4-FFF2-40B4-BE49-F238E27FC236}">
+                <a16:creationId xmlns:a16="http://schemas.microsoft.com/office/drawing/2014/main" id="{0406CE85-1745-F984-3981-F52FD11E3013}"/>
+              </a:ext>
+            </a:extLst>
+          </p:cNvPr>
+          <p:cNvSpPr>
+            <a:spLocks noGrp="1"/>
+          </p:cNvSpPr>
+          <p:nvPr>
+            <p:ph idx="1"/>
+          </p:nvPr>
+        </p:nvSpPr>
+        <p:spPr/>
+        <p:txBody>
+          <a:bodyPr>
+            <a:normAutofit fontScale="77500" lnSpcReduction="20000"/>
+          </a:bodyPr>
+          <a:lstStyle/>
+          <a:p>
+            <a:r>
+              <a:rPr lang="en-US" dirty="0" err="1"/>
+              <a:t>Display:grid</a:t>
+            </a:r>
+            <a:r>
+              <a:rPr lang="en-US" dirty="0"/>
+              <a:t> – parent container</a:t>
+            </a:r>
+          </a:p>
+          <a:p>
+            <a:r>
+              <a:rPr lang="en-US" dirty="0"/>
+              <a:t>Gird-template-columns  - columns – count , width</a:t>
+            </a:r>
+          </a:p>
+          <a:p>
+            <a:r>
+              <a:rPr lang="en-US" dirty="0"/>
+              <a:t>Gap:15px – Row and Columns b/w 15pxgap</a:t>
+            </a:r>
+          </a:p>
+          <a:p>
+            <a:r>
+              <a:rPr lang="en-US" dirty="0"/>
+              <a:t>Row-gap</a:t>
+            </a:r>
+          </a:p>
+          <a:p>
+            <a:r>
+              <a:rPr lang="en-US" dirty="0"/>
+              <a:t>Column-gap</a:t>
+            </a:r>
+          </a:p>
+          <a:p>
+            <a:r>
+              <a:rPr lang="en-US" dirty="0"/>
+              <a:t> </a:t>
+            </a:r>
+            <a:r>
+              <a:rPr lang="en-US" dirty="0" err="1"/>
+              <a:t>fr</a:t>
+            </a:r>
+            <a:r>
+              <a:rPr lang="en-US" dirty="0"/>
+              <a:t> – fraction</a:t>
+            </a:r>
+          </a:p>
+          <a:p>
+            <a:r>
+              <a:rPr lang="en-US" dirty="0"/>
+              <a:t>% - container</a:t>
+            </a:r>
+          </a:p>
+          <a:p>
+            <a:r>
+              <a:rPr lang="en-US" dirty="0" err="1"/>
+              <a:t>Px</a:t>
+            </a:r>
+            <a:r>
+              <a:rPr lang="en-US" dirty="0"/>
+              <a:t> – fixed</a:t>
+            </a:r>
+          </a:p>
+          <a:p>
+            <a:r>
+              <a:rPr lang="en-US" dirty="0"/>
+              <a:t>Repeat(</a:t>
+            </a:r>
+            <a:r>
+              <a:rPr lang="en-US" dirty="0" err="1"/>
+              <a:t>number,size</a:t>
+            </a:r>
+            <a:r>
+              <a:rPr lang="en-US" dirty="0"/>
+              <a:t>)</a:t>
+            </a:r>
+          </a:p>
+          <a:p>
+            <a:r>
+              <a:rPr lang="en-US" dirty="0"/>
+              <a:t>Grid-template-rows – rows</a:t>
+            </a:r>
+          </a:p>
+          <a:p>
+            <a:r>
+              <a:rPr lang="en-US" dirty="0"/>
+              <a:t>Grid-column</a:t>
+            </a:r>
+          </a:p>
+          <a:p>
+            <a:r>
+              <a:rPr lang="en-US" dirty="0"/>
+              <a:t>Grid-row</a:t>
+            </a:r>
+          </a:p>
+        </p:txBody>
+      </p:sp>
+    </p:spTree>
+    <p:extLst>
+      <p:ext uri="{BB962C8B-B14F-4D97-AF65-F5344CB8AC3E}">
+        <p14:creationId xmlns:p14="http://schemas.microsoft.com/office/powerpoint/2010/main" val="2364459520"/>
       </p:ext>
     </p:extLst>
   </p:cSld>

--- a/day03.pptx
+++ b/day03.pptx
@@ -5,7 +5,7 @@
     <p:sldMasterId id="2147483648" r:id="rId1"/>
   </p:sldMasterIdLst>
   <p:notesMasterIdLst>
-    <p:notesMasterId r:id="rId19"/>
+    <p:notesMasterId r:id="rId21"/>
   </p:notesMasterIdLst>
   <p:sldIdLst>
     <p:sldId id="256" r:id="rId2"/>
@@ -25,6 +25,8 @@
     <p:sldId id="270" r:id="rId16"/>
     <p:sldId id="271" r:id="rId17"/>
     <p:sldId id="272" r:id="rId18"/>
+    <p:sldId id="273" r:id="rId19"/>
+    <p:sldId id="274" r:id="rId20"/>
   </p:sldIdLst>
   <p:sldSz cx="12192000" cy="6858000"/>
   <p:notesSz cx="6858000" cy="9144000"/>
@@ -689,7 +691,7 @@
           <a:p>
             <a:fld id="{2B346891-79C8-8C42-A264-D9976EDAD437}" type="datetimeFigureOut">
               <a:rPr lang="en-US" smtClean="0"/>
-              <a:t>10/14/26</a:t>
+              <a:t>10/28/26</a:t>
             </a:fld>
             <a:endParaRPr lang="en-US"/>
           </a:p>
@@ -1190,7 +1192,7 @@
           <a:p>
             <a:fld id="{2160428C-B2E7-3E4C-BEA2-61A621D3A559}" type="datetimeFigureOut">
               <a:rPr lang="en-US" smtClean="0"/>
-              <a:t>10/14/26</a:t>
+              <a:t>10/28/26</a:t>
             </a:fld>
             <a:endParaRPr lang="en-US"/>
           </a:p>
@@ -1390,7 +1392,7 @@
           <a:p>
             <a:fld id="{2160428C-B2E7-3E4C-BEA2-61A621D3A559}" type="datetimeFigureOut">
               <a:rPr lang="en-US" smtClean="0"/>
-              <a:t>10/14/26</a:t>
+              <a:t>10/28/26</a:t>
             </a:fld>
             <a:endParaRPr lang="en-US"/>
           </a:p>
@@ -1600,7 +1602,7 @@
           <a:p>
             <a:fld id="{2160428C-B2E7-3E4C-BEA2-61A621D3A559}" type="datetimeFigureOut">
               <a:rPr lang="en-US" smtClean="0"/>
-              <a:t>10/14/26</a:t>
+              <a:t>10/28/26</a:t>
             </a:fld>
             <a:endParaRPr lang="en-US"/>
           </a:p>
@@ -1800,7 +1802,7 @@
           <a:p>
             <a:fld id="{2160428C-B2E7-3E4C-BEA2-61A621D3A559}" type="datetimeFigureOut">
               <a:rPr lang="en-US" smtClean="0"/>
-              <a:t>10/14/26</a:t>
+              <a:t>10/28/26</a:t>
             </a:fld>
             <a:endParaRPr lang="en-US"/>
           </a:p>
@@ -2076,7 +2078,7 @@
           <a:p>
             <a:fld id="{2160428C-B2E7-3E4C-BEA2-61A621D3A559}" type="datetimeFigureOut">
               <a:rPr lang="en-US" smtClean="0"/>
-              <a:t>10/14/26</a:t>
+              <a:t>10/28/26</a:t>
             </a:fld>
             <a:endParaRPr lang="en-US"/>
           </a:p>
@@ -2344,7 +2346,7 @@
           <a:p>
             <a:fld id="{2160428C-B2E7-3E4C-BEA2-61A621D3A559}" type="datetimeFigureOut">
               <a:rPr lang="en-US" smtClean="0"/>
-              <a:t>10/14/26</a:t>
+              <a:t>10/28/26</a:t>
             </a:fld>
             <a:endParaRPr lang="en-US"/>
           </a:p>
@@ -2759,7 +2761,7 @@
           <a:p>
             <a:fld id="{2160428C-B2E7-3E4C-BEA2-61A621D3A559}" type="datetimeFigureOut">
               <a:rPr lang="en-US" smtClean="0"/>
-              <a:t>10/14/26</a:t>
+              <a:t>10/28/26</a:t>
             </a:fld>
             <a:endParaRPr lang="en-US"/>
           </a:p>
@@ -2901,7 +2903,7 @@
           <a:p>
             <a:fld id="{2160428C-B2E7-3E4C-BEA2-61A621D3A559}" type="datetimeFigureOut">
               <a:rPr lang="en-US" smtClean="0"/>
-              <a:t>10/14/26</a:t>
+              <a:t>10/28/26</a:t>
             </a:fld>
             <a:endParaRPr lang="en-US"/>
           </a:p>
@@ -3014,7 +3016,7 @@
           <a:p>
             <a:fld id="{2160428C-B2E7-3E4C-BEA2-61A621D3A559}" type="datetimeFigureOut">
               <a:rPr lang="en-US" smtClean="0"/>
-              <a:t>10/14/26</a:t>
+              <a:t>10/28/26</a:t>
             </a:fld>
             <a:endParaRPr lang="en-US"/>
           </a:p>
@@ -3327,7 +3329,7 @@
           <a:p>
             <a:fld id="{2160428C-B2E7-3E4C-BEA2-61A621D3A559}" type="datetimeFigureOut">
               <a:rPr lang="en-US" smtClean="0"/>
-              <a:t>10/14/26</a:t>
+              <a:t>10/28/26</a:t>
             </a:fld>
             <a:endParaRPr lang="en-US"/>
           </a:p>
@@ -3616,7 +3618,7 @@
           <a:p>
             <a:fld id="{2160428C-B2E7-3E4C-BEA2-61A621D3A559}" type="datetimeFigureOut">
               <a:rPr lang="en-US" smtClean="0"/>
-              <a:t>10/14/26</a:t>
+              <a:t>10/28/26</a:t>
             </a:fld>
             <a:endParaRPr lang="en-US"/>
           </a:p>
@@ -3859,7 +3861,7 @@
           <a:p>
             <a:fld id="{2160428C-B2E7-3E4C-BEA2-61A621D3A559}" type="datetimeFigureOut">
               <a:rPr lang="en-US" smtClean="0"/>
-              <a:t>10/14/26</a:t>
+              <a:t>10/28/26</a:t>
             </a:fld>
             <a:endParaRPr lang="en-US"/>
           </a:p>
@@ -6064,6 +6066,12 @@
             </a:r>
           </a:p>
           <a:p>
+            <a:r>
+              <a:rPr lang="en-US" dirty="0"/>
+              <a:t>Flex Layout</a:t>
+            </a:r>
+          </a:p>
+          <a:p>
             <a:endParaRPr lang="en-US" dirty="0"/>
           </a:p>
           <a:p>
@@ -7048,31 +7056,6 @@
       </p:grpSpPr>
       <p:sp>
         <p:nvSpPr>
-          <p:cNvPr id="2" name="Title 1">
-            <a:extLst>
-              <a:ext uri="{FF2B5EF4-FFF2-40B4-BE49-F238E27FC236}">
-                <a16:creationId xmlns:a16="http://schemas.microsoft.com/office/drawing/2014/main" id="{CB6C0BE4-B48E-03CA-A94D-8DCF8A4D10E9}"/>
-              </a:ext>
-            </a:extLst>
-          </p:cNvPr>
-          <p:cNvSpPr>
-            <a:spLocks noGrp="1"/>
-          </p:cNvSpPr>
-          <p:nvPr>
-            <p:ph type="title"/>
-          </p:nvPr>
-        </p:nvSpPr>
-        <p:spPr/>
-        <p:txBody>
-          <a:bodyPr/>
-          <a:lstStyle/>
-          <a:p>
-            <a:endParaRPr lang="en-US"/>
-          </a:p>
-        </p:txBody>
-      </p:sp>
-      <p:sp>
-        <p:nvSpPr>
           <p:cNvPr id="3" name="Content Placeholder 2">
             <a:extLst>
               <a:ext uri="{FF2B5EF4-FFF2-40B4-BE49-F238E27FC236}">
@@ -7087,10 +7070,15 @@
             <p:ph idx="1"/>
           </p:nvPr>
         </p:nvSpPr>
-        <p:spPr/>
+        <p:spPr>
+          <a:xfrm>
+            <a:off x="585926" y="284085"/>
+            <a:ext cx="10767874" cy="5892878"/>
+          </a:xfrm>
+        </p:spPr>
         <p:txBody>
           <a:bodyPr>
-            <a:normAutofit fontScale="77500" lnSpcReduction="20000"/>
+            <a:normAutofit lnSpcReduction="10000"/>
           </a:bodyPr>
           <a:lstStyle/>
           <a:p>
@@ -7195,6 +7183,591 @@
     <p:extLst>
       <p:ext uri="{BB962C8B-B14F-4D97-AF65-F5344CB8AC3E}">
         <p14:creationId xmlns:p14="http://schemas.microsoft.com/office/powerpoint/2010/main" val="2364459520"/>
+      </p:ext>
+    </p:extLst>
+  </p:cSld>
+  <p:clrMapOvr>
+    <a:masterClrMapping/>
+  </p:clrMapOvr>
+</p:sld>
+</file>
+
+<file path=ppt/slides/slide18.xml><?xml version="1.0" encoding="utf-8"?>
+<p:sld xmlns:a="http://schemas.openxmlformats.org/drawingml/2006/main" xmlns:r="http://schemas.openxmlformats.org/officeDocument/2006/relationships" xmlns:p="http://schemas.openxmlformats.org/presentationml/2006/main">
+  <p:cSld>
+    <p:spTree>
+      <p:nvGrpSpPr>
+        <p:cNvPr id="1" name=""/>
+        <p:cNvGrpSpPr/>
+        <p:nvPr/>
+      </p:nvGrpSpPr>
+      <p:grpSpPr>
+        <a:xfrm>
+          <a:off x="0" y="0"/>
+          <a:ext cx="0" cy="0"/>
+          <a:chOff x="0" y="0"/>
+          <a:chExt cx="0" cy="0"/>
+        </a:xfrm>
+      </p:grpSpPr>
+      <p:sp>
+        <p:nvSpPr>
+          <p:cNvPr id="3" name="Content Placeholder 2">
+            <a:extLst>
+              <a:ext uri="{FF2B5EF4-FFF2-40B4-BE49-F238E27FC236}">
+                <a16:creationId xmlns:a16="http://schemas.microsoft.com/office/drawing/2014/main" id="{B533258D-DAD5-8220-698A-A376CDC364C0}"/>
+              </a:ext>
+            </a:extLst>
+          </p:cNvPr>
+          <p:cNvSpPr>
+            <a:spLocks noGrp="1"/>
+          </p:cNvSpPr>
+          <p:nvPr>
+            <p:ph idx="1"/>
+          </p:nvPr>
+        </p:nvSpPr>
+        <p:spPr>
+          <a:xfrm>
+            <a:off x="838200" y="310718"/>
+            <a:ext cx="10515600" cy="5866245"/>
+          </a:xfrm>
+        </p:spPr>
+        <p:txBody>
+          <a:bodyPr/>
+          <a:lstStyle/>
+          <a:p>
+            <a:r>
+              <a:rPr lang="en-US" dirty="0"/>
+              <a:t>Layout system- webpage par elements arrange. Row aur columns</a:t>
+            </a:r>
+          </a:p>
+          <a:p>
+            <a:r>
+              <a:rPr lang="en-US" dirty="0"/>
+              <a:t>2d</a:t>
+            </a:r>
+          </a:p>
+          <a:p>
+            <a:r>
+              <a:rPr lang="en-US" dirty="0"/>
+              <a:t> Flexbox</a:t>
+            </a:r>
+          </a:p>
+          <a:p>
+            <a:r>
+              <a:rPr lang="en-US" dirty="0"/>
+              <a:t>Layout system- 1d</a:t>
+            </a:r>
+          </a:p>
+          <a:p>
+            <a:pPr lvl="1"/>
+            <a:r>
+              <a:rPr lang="en-US" dirty="0"/>
+              <a:t>Website ka navigation</a:t>
+            </a:r>
+          </a:p>
+          <a:p>
+            <a:pPr lvl="1"/>
+            <a:r>
+              <a:rPr lang="en-US" dirty="0"/>
+              <a:t>Ek hi line me buttons</a:t>
+            </a:r>
+          </a:p>
+          <a:p>
+            <a:pPr lvl="1"/>
+            <a:r>
+              <a:rPr lang="en-US" dirty="0"/>
+              <a:t>Logo left aur login button right</a:t>
+            </a:r>
+          </a:p>
+          <a:p>
+            <a:pPr lvl="1"/>
+            <a:r>
+              <a:rPr lang="en-US" dirty="0"/>
+              <a:t>Cards </a:t>
+            </a:r>
+            <a:r>
+              <a:rPr lang="en-US" dirty="0" err="1"/>
+              <a:t>ke</a:t>
+            </a:r>
+            <a:r>
+              <a:rPr lang="en-US" dirty="0"/>
+              <a:t> </a:t>
+            </a:r>
+            <a:r>
+              <a:rPr lang="en-US" dirty="0" err="1"/>
+              <a:t>ander</a:t>
+            </a:r>
+            <a:r>
+              <a:rPr lang="en-US" dirty="0"/>
+              <a:t> content ko align </a:t>
+            </a:r>
+            <a:r>
+              <a:rPr lang="en-US" dirty="0" err="1"/>
+              <a:t>karna</a:t>
+            </a:r>
+            <a:endParaRPr lang="en-US" dirty="0"/>
+          </a:p>
+        </p:txBody>
+      </p:sp>
+    </p:spTree>
+    <p:extLst>
+      <p:ext uri="{BB962C8B-B14F-4D97-AF65-F5344CB8AC3E}">
+        <p14:creationId xmlns:p14="http://schemas.microsoft.com/office/powerpoint/2010/main" val="2998614455"/>
+      </p:ext>
+    </p:extLst>
+  </p:cSld>
+  <p:clrMapOvr>
+    <a:masterClrMapping/>
+  </p:clrMapOvr>
+</p:sld>
+</file>
+
+<file path=ppt/slides/slide19.xml><?xml version="1.0" encoding="utf-8"?>
+<p:sld xmlns:a="http://schemas.openxmlformats.org/drawingml/2006/main" xmlns:r="http://schemas.openxmlformats.org/officeDocument/2006/relationships" xmlns:p="http://schemas.openxmlformats.org/presentationml/2006/main">
+  <p:cSld>
+    <p:spTree>
+      <p:nvGrpSpPr>
+        <p:cNvPr id="1" name=""/>
+        <p:cNvGrpSpPr/>
+        <p:nvPr/>
+      </p:nvGrpSpPr>
+      <p:grpSpPr>
+        <a:xfrm>
+          <a:off x="0" y="0"/>
+          <a:ext cx="0" cy="0"/>
+          <a:chOff x="0" y="0"/>
+          <a:chExt cx="0" cy="0"/>
+        </a:xfrm>
+      </p:grpSpPr>
+      <p:graphicFrame>
+        <p:nvGraphicFramePr>
+          <p:cNvPr id="5" name="Content Placeholder 4">
+            <a:extLst>
+              <a:ext uri="{FF2B5EF4-FFF2-40B4-BE49-F238E27FC236}">
+                <a16:creationId xmlns:a16="http://schemas.microsoft.com/office/drawing/2014/main" id="{800DED24-5EA5-8243-6273-63DEE78A74D8}"/>
+              </a:ext>
+            </a:extLst>
+          </p:cNvPr>
+          <p:cNvGraphicFramePr>
+            <a:graphicFrameLocks noGrp="1"/>
+          </p:cNvGraphicFramePr>
+          <p:nvPr>
+            <p:ph idx="1"/>
+            <p:extLst>
+              <p:ext uri="{D42A27DB-BD31-4B8C-83A1-F6EECF244321}">
+                <p14:modId xmlns:p14="http://schemas.microsoft.com/office/powerpoint/2010/main" val="349522595"/>
+              </p:ext>
+            </p:extLst>
+          </p:nvPr>
+        </p:nvGraphicFramePr>
+        <p:xfrm>
+          <a:off x="838200" y="1825625"/>
+          <a:ext cx="10515600" cy="3032760"/>
+        </p:xfrm>
+        <a:graphic>
+          <a:graphicData uri="http://schemas.openxmlformats.org/drawingml/2006/table">
+            <a:tbl>
+              <a:tblPr firstRow="1" bandRow="1">
+                <a:tableStyleId>{5C22544A-7EE6-4342-B048-85BDC9FD1C3A}</a:tableStyleId>
+              </a:tblPr>
+              <a:tblGrid>
+                <a:gridCol w="3505200">
+                  <a:extLst>
+                    <a:ext uri="{9D8B030D-6E8A-4147-A177-3AD203B41FA5}">
+                      <a16:colId xmlns:a16="http://schemas.microsoft.com/office/drawing/2014/main" val="2621694238"/>
+                    </a:ext>
+                  </a:extLst>
+                </a:gridCol>
+                <a:gridCol w="3505200">
+                  <a:extLst>
+                    <a:ext uri="{9D8B030D-6E8A-4147-A177-3AD203B41FA5}">
+                      <a16:colId xmlns:a16="http://schemas.microsoft.com/office/drawing/2014/main" val="3430855985"/>
+                    </a:ext>
+                  </a:extLst>
+                </a:gridCol>
+                <a:gridCol w="3505200">
+                  <a:extLst>
+                    <a:ext uri="{9D8B030D-6E8A-4147-A177-3AD203B41FA5}">
+                      <a16:colId xmlns:a16="http://schemas.microsoft.com/office/drawing/2014/main" val="3282815480"/>
+                    </a:ext>
+                  </a:extLst>
+                </a:gridCol>
+              </a:tblGrid>
+              <a:tr h="370840">
+                <a:tc>
+                  <a:txBody>
+                    <a:bodyPr/>
+                    <a:lstStyle/>
+                    <a:p>
+                      <a:r>
+                        <a:rPr lang="en-US" dirty="0"/>
+                        <a:t>Feature</a:t>
+                      </a:r>
+                    </a:p>
+                  </a:txBody>
+                  <a:tcPr/>
+                </a:tc>
+                <a:tc>
+                  <a:txBody>
+                    <a:bodyPr/>
+                    <a:lstStyle/>
+                    <a:p>
+                      <a:pPr marL="0" marR="0" lvl="0" indent="0" algn="l" defTabSz="914400" rtl="0" eaLnBrk="1" fontAlgn="auto" latinLnBrk="0" hangingPunct="1">
+                        <a:lnSpc>
+                          <a:spcPct val="100000"/>
+                        </a:lnSpc>
+                        <a:spcBef>
+                          <a:spcPts val="0"/>
+                        </a:spcBef>
+                        <a:spcAft>
+                          <a:spcPts val="0"/>
+                        </a:spcAft>
+                        <a:buClrTx/>
+                        <a:buSzTx/>
+                        <a:buFontTx/>
+                        <a:buNone/>
+                        <a:tabLst/>
+                        <a:defRPr/>
+                      </a:pPr>
+                      <a:r>
+                        <a:rPr lang="en-US"/>
+                        <a:t>Grid 2017</a:t>
+                      </a:r>
+                      <a:endParaRPr lang="en-US" dirty="0"/>
+                    </a:p>
+                  </a:txBody>
+                  <a:tcPr/>
+                </a:tc>
+                <a:tc>
+                  <a:txBody>
+                    <a:bodyPr/>
+                    <a:lstStyle/>
+                    <a:p>
+                      <a:r>
+                        <a:rPr lang="en-US" dirty="0"/>
+                        <a:t>Flexbox 2009</a:t>
+                      </a:r>
+                    </a:p>
+                  </a:txBody>
+                  <a:tcPr/>
+                </a:tc>
+                <a:extLst>
+                  <a:ext uri="{0D108BD9-81ED-4DB2-BD59-A6C34878D82A}">
+                    <a16:rowId xmlns:a16="http://schemas.microsoft.com/office/drawing/2014/main" val="333933765"/>
+                  </a:ext>
+                </a:extLst>
+              </a:tr>
+              <a:tr h="370840">
+                <a:tc>
+                  <a:txBody>
+                    <a:bodyPr/>
+                    <a:lstStyle/>
+                    <a:p>
+                      <a:r>
+                        <a:rPr lang="en-US" dirty="0"/>
+                        <a:t>Main purpose</a:t>
+                      </a:r>
+                    </a:p>
+                  </a:txBody>
+                  <a:tcPr/>
+                </a:tc>
+                <a:tc>
+                  <a:txBody>
+                    <a:bodyPr/>
+                    <a:lstStyle/>
+                    <a:p>
+                      <a:pPr marL="0" marR="0" lvl="0" indent="0" algn="l" defTabSz="914400" rtl="0" eaLnBrk="1" fontAlgn="auto" latinLnBrk="0" hangingPunct="1">
+                        <a:lnSpc>
+                          <a:spcPct val="100000"/>
+                        </a:lnSpc>
+                        <a:spcBef>
+                          <a:spcPts val="0"/>
+                        </a:spcBef>
+                        <a:spcAft>
+                          <a:spcPts val="0"/>
+                        </a:spcAft>
+                        <a:buClrTx/>
+                        <a:buSzTx/>
+                        <a:buFontTx/>
+                        <a:buNone/>
+                        <a:tabLst/>
+                        <a:defRPr/>
+                      </a:pPr>
+                      <a:r>
+                        <a:rPr lang="en-US" dirty="0"/>
+                        <a:t>Row  columns</a:t>
+                      </a:r>
+                    </a:p>
+                    <a:p>
+                      <a:endParaRPr lang="en-US" dirty="0"/>
+                    </a:p>
+                  </a:txBody>
+                  <a:tcPr/>
+                </a:tc>
+                <a:tc>
+                  <a:txBody>
+                    <a:bodyPr/>
+                    <a:lstStyle/>
+                    <a:p>
+                      <a:r>
+                        <a:rPr lang="en-US" dirty="0"/>
+                        <a:t>Row </a:t>
+                      </a:r>
+                      <a:r>
+                        <a:rPr lang="en-US" dirty="0" err="1"/>
+                        <a:t>ya</a:t>
+                      </a:r>
+                      <a:r>
+                        <a:rPr lang="en-US" dirty="0"/>
+                        <a:t> column</a:t>
+                      </a:r>
+                    </a:p>
+                  </a:txBody>
+                  <a:tcPr/>
+                </a:tc>
+                <a:extLst>
+                  <a:ext uri="{0D108BD9-81ED-4DB2-BD59-A6C34878D82A}">
+                    <a16:rowId xmlns:a16="http://schemas.microsoft.com/office/drawing/2014/main" val="2213276511"/>
+                  </a:ext>
+                </a:extLst>
+              </a:tr>
+              <a:tr h="370840">
+                <a:tc>
+                  <a:txBody>
+                    <a:bodyPr/>
+                    <a:lstStyle/>
+                    <a:p>
+                      <a:r>
+                        <a:rPr lang="en-US" dirty="0"/>
+                        <a:t>Layout</a:t>
+                      </a:r>
+                    </a:p>
+                  </a:txBody>
+                  <a:tcPr/>
+                </a:tc>
+                <a:tc>
+                  <a:txBody>
+                    <a:bodyPr/>
+                    <a:lstStyle/>
+                    <a:p>
+                      <a:pPr marL="0" marR="0" lvl="0" indent="0" algn="l" defTabSz="914400" rtl="0" eaLnBrk="1" fontAlgn="auto" latinLnBrk="0" hangingPunct="1">
+                        <a:lnSpc>
+                          <a:spcPct val="100000"/>
+                        </a:lnSpc>
+                        <a:spcBef>
+                          <a:spcPts val="0"/>
+                        </a:spcBef>
+                        <a:spcAft>
+                          <a:spcPts val="0"/>
+                        </a:spcAft>
+                        <a:buClrTx/>
+                        <a:buSzTx/>
+                        <a:buFontTx/>
+                        <a:buNone/>
+                        <a:tabLst/>
+                        <a:defRPr/>
+                      </a:pPr>
+                      <a:r>
+                        <a:rPr lang="en-US" dirty="0"/>
+                        <a:t>2D</a:t>
+                      </a:r>
+                    </a:p>
+                    <a:p>
+                      <a:endParaRPr lang="en-US" dirty="0"/>
+                    </a:p>
+                  </a:txBody>
+                  <a:tcPr/>
+                </a:tc>
+                <a:tc>
+                  <a:txBody>
+                    <a:bodyPr/>
+                    <a:lstStyle/>
+                    <a:p>
+                      <a:r>
+                        <a:rPr lang="en-US" dirty="0"/>
+                        <a:t>1D</a:t>
+                      </a:r>
+                    </a:p>
+                  </a:txBody>
+                  <a:tcPr/>
+                </a:tc>
+                <a:extLst>
+                  <a:ext uri="{0D108BD9-81ED-4DB2-BD59-A6C34878D82A}">
+                    <a16:rowId xmlns:a16="http://schemas.microsoft.com/office/drawing/2014/main" val="951547614"/>
+                  </a:ext>
+                </a:extLst>
+              </a:tr>
+              <a:tr h="370840">
+                <a:tc>
+                  <a:txBody>
+                    <a:bodyPr/>
+                    <a:lstStyle/>
+                    <a:p>
+                      <a:r>
+                        <a:rPr lang="en-US" dirty="0"/>
+                        <a:t>Best for</a:t>
+                      </a:r>
+                    </a:p>
+                  </a:txBody>
+                  <a:tcPr/>
+                </a:tc>
+                <a:tc>
+                  <a:txBody>
+                    <a:bodyPr/>
+                    <a:lstStyle/>
+                    <a:p>
+                      <a:pPr marL="0" marR="0" lvl="0" indent="0" algn="l" defTabSz="914400" rtl="0" eaLnBrk="1" fontAlgn="auto" latinLnBrk="0" hangingPunct="1">
+                        <a:lnSpc>
+                          <a:spcPct val="100000"/>
+                        </a:lnSpc>
+                        <a:spcBef>
+                          <a:spcPts val="0"/>
+                        </a:spcBef>
+                        <a:spcAft>
+                          <a:spcPts val="0"/>
+                        </a:spcAft>
+                        <a:buClrTx/>
+                        <a:buSzTx/>
+                        <a:buFontTx/>
+                        <a:buNone/>
+                        <a:tabLst/>
+                        <a:defRPr/>
+                      </a:pPr>
+                      <a:r>
+                        <a:rPr lang="en-US" dirty="0"/>
+                        <a:t>Page structure, gallery</a:t>
+                      </a:r>
+                    </a:p>
+                    <a:p>
+                      <a:endParaRPr lang="en-US" dirty="0"/>
+                    </a:p>
+                  </a:txBody>
+                  <a:tcPr/>
+                </a:tc>
+                <a:tc>
+                  <a:txBody>
+                    <a:bodyPr/>
+                    <a:lstStyle/>
+                    <a:p>
+                      <a:r>
+                        <a:rPr lang="en-US" dirty="0"/>
+                        <a:t>Navbar, buttons, alignment</a:t>
+                      </a:r>
+                    </a:p>
+                  </a:txBody>
+                  <a:tcPr/>
+                </a:tc>
+                <a:extLst>
+                  <a:ext uri="{0D108BD9-81ED-4DB2-BD59-A6C34878D82A}">
+                    <a16:rowId xmlns:a16="http://schemas.microsoft.com/office/drawing/2014/main" val="1628709808"/>
+                  </a:ext>
+                </a:extLst>
+              </a:tr>
+              <a:tr h="370840">
+                <a:tc>
+                  <a:txBody>
+                    <a:bodyPr/>
+                    <a:lstStyle/>
+                    <a:p>
+                      <a:r>
+                        <a:rPr lang="en-US" dirty="0"/>
+                        <a:t>Space control</a:t>
+                      </a:r>
+                    </a:p>
+                  </a:txBody>
+                  <a:tcPr/>
+                </a:tc>
+                <a:tc>
+                  <a:txBody>
+                    <a:bodyPr/>
+                    <a:lstStyle/>
+                    <a:p>
+                      <a:r>
+                        <a:rPr lang="en-US" dirty="0"/>
+                        <a:t>Row aur columns </a:t>
+                      </a:r>
+                      <a:r>
+                        <a:rPr lang="en-US" dirty="0" err="1"/>
+                        <a:t>dono</a:t>
+                      </a:r>
+                      <a:endParaRPr lang="en-US" dirty="0"/>
+                    </a:p>
+                  </a:txBody>
+                  <a:tcPr/>
+                </a:tc>
+                <a:tc>
+                  <a:txBody>
+                    <a:bodyPr/>
+                    <a:lstStyle/>
+                    <a:p>
+                      <a:r>
+                        <a:rPr lang="en-US" dirty="0"/>
+                        <a:t>Main aur cross</a:t>
+                      </a:r>
+                    </a:p>
+                  </a:txBody>
+                  <a:tcPr/>
+                </a:tc>
+                <a:extLst>
+                  <a:ext uri="{0D108BD9-81ED-4DB2-BD59-A6C34878D82A}">
+                    <a16:rowId xmlns:a16="http://schemas.microsoft.com/office/drawing/2014/main" val="2589527440"/>
+                  </a:ext>
+                </a:extLst>
+              </a:tr>
+              <a:tr h="370840">
+                <a:tc>
+                  <a:txBody>
+                    <a:bodyPr/>
+                    <a:lstStyle/>
+                    <a:p>
+                      <a:r>
+                        <a:rPr lang="en-US" dirty="0"/>
+                        <a:t>Wrapping</a:t>
+                      </a:r>
+                    </a:p>
+                  </a:txBody>
+                  <a:tcPr/>
+                </a:tc>
+                <a:tc>
+                  <a:txBody>
+                    <a:bodyPr/>
+                    <a:lstStyle/>
+                    <a:p>
+                      <a:r>
+                        <a:rPr lang="en-US" dirty="0"/>
+                        <a:t>Row define</a:t>
+                      </a:r>
+                    </a:p>
+                  </a:txBody>
+                  <a:tcPr/>
+                </a:tc>
+                <a:tc>
+                  <a:txBody>
+                    <a:bodyPr/>
+                    <a:lstStyle/>
+                    <a:p>
+                      <a:r>
+                        <a:rPr lang="en-US" dirty="0"/>
+                        <a:t>Flex-wrap </a:t>
+                      </a:r>
+                    </a:p>
+                  </a:txBody>
+                  <a:tcPr/>
+                </a:tc>
+                <a:extLst>
+                  <a:ext uri="{0D108BD9-81ED-4DB2-BD59-A6C34878D82A}">
+                    <a16:rowId xmlns:a16="http://schemas.microsoft.com/office/drawing/2014/main" val="1081213647"/>
+                  </a:ext>
+                </a:extLst>
+              </a:tr>
+            </a:tbl>
+          </a:graphicData>
+        </a:graphic>
+      </p:graphicFrame>
+    </p:spTree>
+    <p:extLst>
+      <p:ext uri="{BB962C8B-B14F-4D97-AF65-F5344CB8AC3E}">
+        <p14:creationId xmlns:p14="http://schemas.microsoft.com/office/powerpoint/2010/main" val="1164389790"/>
       </p:ext>
     </p:extLst>
   </p:cSld>
